--- a/kvcache/unified_kv_memory/立项汇报PPTX/推理性能理论论证_20260907_Luna/统一异构KVCache存储池_推理性能理论论证_KPCL_20260908_v3_文风修订_预审版.pptx
+++ b/kvcache/unified_kv_memory/立项汇报PPTX/推理性能理论论证_20260907_Luna/统一异构KVCache存储池_推理性能理论论证_KPCL_20260908_v3_文风修订_预审版.pptx
@@ -4925,9 +4925,9 @@
           <a:p>
             <a:pPr>
               <a:spcAft>
-                <a:spcPts val="1000"/>
-              </a:spcAft>
-              <a:defRPr sz="1650" b="1">
+                <a:spcPts val="800"/>
+              </a:spcAft>
+              <a:defRPr sz="1550" b="1">
                 <a:solidFill>
                   <a:srgbClr val="1D4ED8"/>
                 </a:solidFill>
@@ -4941,9 +4941,9 @@
           <a:p>
             <a:pPr>
               <a:lnSpc>
-                <a:spcPct val="128000"/>
+                <a:spcPct val="122000"/>
               </a:lnSpc>
-              <a:defRPr sz="1200">
+              <a:defRPr sz="1140">
                 <a:solidFill>
                   <a:srgbClr val="0F172A"/>
                 </a:solidFill>
@@ -5027,9 +5027,9 @@
           <a:p>
             <a:pPr>
               <a:spcAft>
-                <a:spcPts val="1000"/>
-              </a:spcAft>
-              <a:defRPr sz="1650" b="1">
+                <a:spcPts val="800"/>
+              </a:spcAft>
+              <a:defRPr sz="1550" b="1">
                 <a:solidFill>
                   <a:srgbClr val="047857"/>
                 </a:solidFill>
@@ -5043,9 +5043,9 @@
           <a:p>
             <a:pPr>
               <a:lnSpc>
-                <a:spcPct val="128000"/>
+                <a:spcPct val="122000"/>
               </a:lnSpc>
-              <a:defRPr sz="1200">
+              <a:defRPr sz="1140">
                 <a:solidFill>
                   <a:srgbClr val="0F172A"/>
                 </a:solidFill>
@@ -5053,7 +5053,7 @@
               </a:defRPr>
             </a:pPr>
             <a:r>
-              <a:t>基于 70B 模型常数推导：逐层流水掩盖 98.7% 传输 [推导]，步频退避将干扰降至 1.57% [推导]，令牌桶消除 Incast 丢包 [推导]。</a:t>
+              <a:t>70B 关键路径推导：逐层流水掩盖 98.7% 传输，步频退避控制干扰在 1.57%，端侧整形消除 Incast [推导值]。</a:t>
             </a:r>
           </a:p>
         </p:txBody>
@@ -5129,9 +5129,9 @@
           <a:p>
             <a:pPr>
               <a:spcAft>
-                <a:spcPts val="1000"/>
-              </a:spcAft>
-              <a:defRPr sz="1650" b="1">
+                <a:spcPts val="800"/>
+              </a:spcAft>
+              <a:defRPr sz="1550" b="1">
                 <a:solidFill>
                   <a:srgbClr val="B45309"/>
                 </a:solidFill>
@@ -5145,9 +5145,9 @@
           <a:p>
             <a:pPr>
               <a:lnSpc>
-                <a:spcPct val="128000"/>
+                <a:spcPct val="122000"/>
               </a:lnSpc>
-              <a:defRPr sz="1200">
+              <a:defRPr sz="1140">
                 <a:solidFill>
                   <a:srgbClr val="0F172A"/>
                 </a:solidFill>
@@ -5315,7 +5315,7 @@
                 </a:solidFill>
                 <a:latin typeface="Microsoft YaHei"/>
               </a:rPr>
-              <a:t>核心使命：</a:t>
+              <a:t>立项使命：</a:t>
             </a:r>
             <a:r>
               <a:rPr sz="1300">
@@ -7889,7 +7889,7 @@
                         </a:defRPr>
                       </a:pPr>
                       <a:r>
-                        <a:t>32.4 ms [模型推导值] (整组步调齐头并进)</a:t>
+                        <a:t>32.4 ms [模型推导值] (整组齐头并进)</a:t>
                       </a:r>
                     </a:p>
                   </a:txBody>
@@ -8547,7 +8547,7 @@
               </a:defRPr>
             </a:pPr>
             <a:r>
-              <a:t>全概率分布模型：F_T(t) = h · F_h(t) + (1 − h) · F_m(t) [统计数学模型]：</a:t>
+              <a:t>全概率分布模型 [统计数学模型]：F_T(t) = h · F_h(t) + (1 − h) · F_m(t)</a:t>
             </a:r>
           </a:p>
           <a:p>
@@ -10458,10 +10458,10 @@
                 <a:tableStyleId>{5C22544A-7EE6-4342-B048-85BDC9FD1C3A}</a:tableStyleId>
               </a:tblPr>
               <a:tblGrid>
-                <a:gridCol w="1828800"/>
-                <a:gridCol w="2011680"/>
-                <a:gridCol w="3291840"/>
-                <a:gridCol w="3962095"/>
+                <a:gridCol w="1691640"/>
+                <a:gridCol w="1783080"/>
+                <a:gridCol w="3703320"/>
+                <a:gridCol w="3916375"/>
               </a:tblGrid>
               <a:tr h="462280">
                 <a:tc>
@@ -10478,7 +10478,7 @@
                         </a:defRPr>
                       </a:pPr>
                       <a:r>
-                        <a:t>通信模式编号与名称</a:t>
+                        <a:t>通信模式与编号</a:t>
                       </a:r>
                     </a:p>
                   </a:txBody>
@@ -10502,7 +10502,7 @@
                         </a:defRPr>
                       </a:pPr>
                       <a:r>
-                        <a:t>大模型真实触发场景</a:t>
+                        <a:t>真实触发场景</a:t>
                       </a:r>
                     </a:p>
                   </a:txBody>
@@ -10550,7 +10550,7 @@
                         </a:defRPr>
                       </a:pPr>
                       <a:r>
-                        <a:t>向底层提炼的核心诉求与催熟的关键技术 [契约目标]</a:t>
+                        <a:t>提炼核心诉求与催熟技术 [契约目标]</a:t>
                       </a:r>
                     </a:p>
                   </a:txBody>
@@ -10568,7 +10568,7 @@
                     <a:lstStyle/>
                     <a:p>
                       <a:pPr algn="ctr">
-                        <a:defRPr sz="1050" b="1">
+                        <a:defRPr sz="980" b="1">
                           <a:solidFill>
                             <a:srgbClr val="0F172A"/>
                           </a:solidFill>
@@ -10592,7 +10592,7 @@
                     <a:lstStyle/>
                     <a:p>
                       <a:pPr algn="l">
-                        <a:defRPr sz="1050">
+                        <a:defRPr sz="980">
                           <a:solidFill>
                             <a:srgbClr val="0F172A"/>
                           </a:solidFill>
@@ -10616,7 +10616,7 @@
                     <a:lstStyle/>
                     <a:p>
                       <a:pPr algn="l">
-                        <a:defRPr sz="1050">
+                        <a:defRPr sz="980">
                           <a:solidFill>
                             <a:srgbClr val="0F172A"/>
                           </a:solidFill>
@@ -10624,7 +10624,7 @@
                         </a:defRPr>
                       </a:pPr>
                       <a:r>
-                        <a:t>极高频，包长极小 (64B~4KB) [画像]，要求 P99 &lt; 5µs [目标值]</a:t>
+                        <a:t>极高频，包长极小 (64B~4KB) [画像]，P99 &lt; 5µs [目标值]</a:t>
                       </a:r>
                     </a:p>
                   </a:txBody>
@@ -10640,7 +10640,7 @@
                     <a:lstStyle/>
                     <a:p>
                       <a:pPr algn="l">
-                        <a:defRPr sz="1050">
+                        <a:defRPr sz="980">
                           <a:solidFill>
                             <a:srgbClr val="0F172A"/>
                           </a:solidFill>
@@ -10666,7 +10666,7 @@
                     <a:lstStyle/>
                     <a:p>
                       <a:pPr algn="ctr">
-                        <a:defRPr sz="1050" b="1">
+                        <a:defRPr sz="980" b="1">
                           <a:solidFill>
                             <a:srgbClr val="0F172A"/>
                           </a:solidFill>
@@ -10690,7 +10690,7 @@
                     <a:lstStyle/>
                     <a:p>
                       <a:pPr algn="l">
-                        <a:defRPr sz="1050">
+                        <a:defRPr sz="980">
                           <a:solidFill>
                             <a:srgbClr val="0F172A"/>
                           </a:solidFill>
@@ -10714,7 +10714,7 @@
                     <a:lstStyle/>
                     <a:p>
                       <a:pPr algn="l">
-                        <a:defRPr sz="1050">
+                        <a:defRPr sz="980">
                           <a:solidFill>
                             <a:srgbClr val="0F172A"/>
                           </a:solidFill>
@@ -10722,7 +10722,7 @@
                         </a:defRPr>
                       </a:pPr>
                       <a:r>
-                        <a:t>中大包 (4MB~16MB) [画像]，吞吐受限，单卡需跑满 20GB/s [标称目标]</a:t>
+                        <a:t>中大包 (4MB~16MB) [画像]，单卡跑满 20GB/s [标称目标]</a:t>
                       </a:r>
                     </a:p>
                   </a:txBody>
@@ -10738,7 +10738,7 @@
                     <a:lstStyle/>
                     <a:p>
                       <a:pPr algn="l">
-                        <a:defRPr sz="1050">
+                        <a:defRPr sz="980">
                           <a:solidFill>
                             <a:srgbClr val="0F172A"/>
                           </a:solidFill>
@@ -10746,7 +10746,7 @@
                         </a:defRPr>
                       </a:pPr>
                       <a:r>
-                        <a:t>支持连续物理块描述符批量提交 ➔ 催熟硬件 SGL 描述符编译与 DMA 直达</a:t>
+                        <a:t>支持连续物理块批量提交 ➔ 催熟硬件 SGL 描述符编译与 DMA 直达</a:t>
                       </a:r>
                     </a:p>
                   </a:txBody>
@@ -10764,7 +10764,7 @@
                     <a:lstStyle/>
                     <a:p>
                       <a:pPr algn="ctr">
-                        <a:defRPr sz="1050" b="1">
+                        <a:defRPr sz="980" b="1">
                           <a:solidFill>
                             <a:srgbClr val="0F172A"/>
                           </a:solidFill>
@@ -10788,7 +10788,7 @@
                     <a:lstStyle/>
                     <a:p>
                       <a:pPr algn="l">
-                        <a:defRPr sz="1050">
+                        <a:defRPr sz="980">
                           <a:solidFill>
                             <a:srgbClr val="0F172A"/>
                           </a:solidFill>
@@ -10812,7 +10812,7 @@
                     <a:lstStyle/>
                     <a:p>
                       <a:pPr algn="l">
-                        <a:defRPr sz="1050">
+                        <a:defRPr sz="980">
                           <a:solidFill>
                             <a:srgbClr val="0F172A"/>
                           </a:solidFill>
@@ -10820,7 +10820,7 @@
                         </a:defRPr>
                       </a:pPr>
                       <a:r>
-                        <a:t>80 层微时序，每层 4MB，每隔 2.75ms 突发一次 [物理常数/时序推导]</a:t>
+                        <a:t>80 层微时序，每层 4MB，每隔 2.75ms 突发 [时序推导]</a:t>
                       </a:r>
                     </a:p>
                   </a:txBody>
@@ -10836,7 +10836,7 @@
                     <a:lstStyle/>
                     <a:p>
                       <a:pPr algn="l">
-                        <a:defRPr sz="1050">
+                        <a:defRPr sz="980">
                           <a:solidFill>
                             <a:srgbClr val="0F172A"/>
                           </a:solidFill>
@@ -10862,7 +10862,7 @@
                     <a:lstStyle/>
                     <a:p>
                       <a:pPr algn="ctr">
-                        <a:defRPr sz="1050" b="1">
+                        <a:defRPr sz="980" b="1">
                           <a:solidFill>
                             <a:srgbClr val="0F172A"/>
                           </a:solidFill>
@@ -10886,7 +10886,7 @@
                     <a:lstStyle/>
                     <a:p>
                       <a:pPr algn="l">
-                        <a:defRPr sz="1050">
+                        <a:defRPr sz="980">
                           <a:solidFill>
                             <a:srgbClr val="0F172A"/>
                           </a:solidFill>
@@ -10910,7 +10910,7 @@
                     <a:lstStyle/>
                     <a:p>
                       <a:pPr algn="l">
-                        <a:defRPr sz="1050">
+                        <a:defRPr sz="980">
                           <a:solidFill>
                             <a:srgbClr val="0F172A"/>
                           </a:solidFill>
@@ -10918,7 +10918,7 @@
                         </a:defRPr>
                       </a:pPr>
                       <a:r>
-                        <a:t>8 卡关联流同时启动、同时到达，偏斜比要求 &lt; 1.15 [约束目标]</a:t>
+                        <a:t>8 卡关联流同时启动到达，偏斜比 &lt; 1.15 [约束目标]</a:t>
                       </a:r>
                     </a:p>
                   </a:txBody>
@@ -10934,7 +10934,7 @@
                     <a:lstStyle/>
                     <a:p>
                       <a:pPr algn="l">
-                        <a:defRPr sz="1050">
+                        <a:defRPr sz="980">
                           <a:solidFill>
                             <a:srgbClr val="0F172A"/>
                           </a:solidFill>
@@ -10942,7 +10942,7 @@
                         </a:defRPr>
                       </a:pPr>
                       <a:r>
-                        <a:t>多卡协同门铃与完成状态原子聚合 ➔ 催熟 Coflow 协同流控与防悬挂屏障</a:t>
+                        <a:t>多卡协同门铃与完成聚合 ➔ 催熟 Coflow 协同流控与防挂屏障</a:t>
                       </a:r>
                     </a:p>
                   </a:txBody>
@@ -10960,7 +10960,7 @@
                     <a:lstStyle/>
                     <a:p>
                       <a:pPr algn="ctr">
-                        <a:defRPr sz="1050" b="1">
+                        <a:defRPr sz="980" b="1">
                           <a:solidFill>
                             <a:srgbClr val="0F172A"/>
                           </a:solidFill>
@@ -10984,7 +10984,7 @@
                     <a:lstStyle/>
                     <a:p>
                       <a:pPr algn="l">
-                        <a:defRPr sz="1050">
+                        <a:defRPr sz="980">
                           <a:solidFill>
                             <a:srgbClr val="0F172A"/>
                           </a:solidFill>
@@ -11008,7 +11008,7 @@
                     <a:lstStyle/>
                     <a:p>
                       <a:pPr algn="l">
-                        <a:defRPr sz="1050">
+                        <a:defRPr sz="980">
                           <a:solidFill>
                             <a:srgbClr val="0F172A"/>
                           </a:solidFill>
@@ -11016,7 +11016,7 @@
                         </a:defRPr>
                       </a:pPr>
                       <a:r>
-                        <a:t>高优极短流与大吞吐背景流长时间深度交织 [业务场景]</a:t>
+                        <a:t>高优短流与大吞吐背景流长时间交织 [业务场景]</a:t>
                       </a:r>
                     </a:p>
                   </a:txBody>
@@ -11032,7 +11032,7 @@
                     <a:lstStyle/>
                     <a:p>
                       <a:pPr algn="l">
-                        <a:defRPr sz="1050">
+                        <a:defRPr sz="980">
                           <a:solidFill>
                             <a:srgbClr val="0F172A"/>
                           </a:solidFill>
@@ -11040,7 +11040,7 @@
                         </a:defRPr>
                       </a:pPr>
                       <a:r>
-                        <a:t>DSCP/CoS 硬件优先级映射 (TC0/TC1) ➔ 催熟微秒级反压与显存流控机制</a:t>
+                        <a:t>硬件优先级映射 (TC0/TC1) ➔ 催熟微秒级反压与显存流控机制</a:t>
                       </a:r>
                     </a:p>
                   </a:txBody>
@@ -11058,7 +11058,7 @@
                     <a:lstStyle/>
                     <a:p>
                       <a:pPr algn="ctr">
-                        <a:defRPr sz="1050" b="1">
+                        <a:defRPr sz="980" b="1">
                           <a:solidFill>
                             <a:srgbClr val="0F172A"/>
                           </a:solidFill>
@@ -11082,7 +11082,7 @@
                     <a:lstStyle/>
                     <a:p>
                       <a:pPr algn="l">
-                        <a:defRPr sz="1050">
+                        <a:defRPr sz="980">
                           <a:solidFill>
                             <a:srgbClr val="0F172A"/>
                           </a:solidFill>
@@ -11106,7 +11106,7 @@
                     <a:lstStyle/>
                     <a:p>
                       <a:pPr algn="l">
-                        <a:defRPr sz="1050">
+                        <a:defRPr sz="980">
                           <a:solidFill>
                             <a:srgbClr val="0F172A"/>
                           </a:solidFill>
@@ -11114,7 +11114,7 @@
                         </a:defRPr>
                       </a:pPr>
                       <a:r>
-                        <a:t>16 并发以上汇聚，瞬时突发 512MB 冲击浅缓冲 [负载假设]</a:t>
+                        <a:t>16 并发汇聚，瞬时突发 512MB 冲击浅缓冲 [负载假设]</a:t>
                       </a:r>
                     </a:p>
                   </a:txBody>
@@ -11130,7 +11130,7 @@
                     <a:lstStyle/>
                     <a:p>
                       <a:pPr algn="l">
-                        <a:defRPr sz="1050">
+                        <a:defRPr sz="980">
                           <a:solidFill>
                             <a:srgbClr val="0F172A"/>
                           </a:solidFill>
@@ -11138,7 +11138,7 @@
                         </a:defRPr>
                       </a:pPr>
                       <a:r>
-                        <a:t>基于 RTT 的拥塞通知与端侧突发整形 ➔ 催熟动态拥塞控制算法 (DCQCN/URMA)</a:t>
+                        <a:t>基于 RTT 拥塞通知与端侧突发整形 ➔ 催熟动态拥塞算法 (DCQCN)</a:t>
                       </a:r>
                     </a:p>
                   </a:txBody>
@@ -11156,7 +11156,7 @@
                     <a:lstStyle/>
                     <a:p>
                       <a:pPr algn="ctr">
-                        <a:defRPr sz="1050" b="1">
+                        <a:defRPr sz="980" b="1">
                           <a:solidFill>
                             <a:srgbClr val="0F172A"/>
                           </a:solidFill>
@@ -11180,7 +11180,7 @@
                     <a:lstStyle/>
                     <a:p>
                       <a:pPr algn="l">
-                        <a:defRPr sz="1050">
+                        <a:defRPr sz="980">
                           <a:solidFill>
                             <a:srgbClr val="0F172A"/>
                           </a:solidFill>
@@ -11204,7 +11204,7 @@
                     <a:lstStyle/>
                     <a:p>
                       <a:pPr algn="l">
-                        <a:defRPr sz="1050">
+                        <a:defRPr sz="980">
                           <a:solidFill>
                             <a:srgbClr val="0F172A"/>
                           </a:solidFill>
@@ -11212,7 +11212,7 @@
                         </a:defRPr>
                       </a:pPr>
                       <a:r>
-                        <a:t>1 个源向 N 个实例同时分发相同的万 Token 缓存 [典型负载]</a:t>
+                        <a:t>1 源向 N 实例分发相同万 Token 缓存 [典型负载]</a:t>
                       </a:r>
                     </a:p>
                   </a:txBody>
@@ -11228,7 +11228,7 @@
                     <a:lstStyle/>
                     <a:p>
                       <a:pPr algn="l">
-                        <a:defRPr sz="1050">
+                        <a:defRPr sz="980">
                           <a:solidFill>
                             <a:srgbClr val="0F172A"/>
                           </a:solidFill>
@@ -11236,7 +11236,7 @@
                         </a:defRPr>
                       </a:pPr>
                       <a:r>
-                        <a:t>优先硬件组播，次选高效树状中继 ➔ 催熟底层多播驱动与跨节点级联直通</a:t>
+                        <a:t>优先硬件组播，次选树状中继 ➔ 催熟底层多播驱动与跨节点级联直通</a:t>
                       </a:r>
                     </a:p>
                   </a:txBody>
@@ -11254,7 +11254,7 @@
                     <a:lstStyle/>
                     <a:p>
                       <a:pPr algn="ctr">
-                        <a:defRPr sz="1050" b="1">
+                        <a:defRPr sz="980" b="1">
                           <a:solidFill>
                             <a:srgbClr val="0F172A"/>
                           </a:solidFill>
@@ -11278,7 +11278,7 @@
                     <a:lstStyle/>
                     <a:p>
                       <a:pPr algn="l">
-                        <a:defRPr sz="1050">
+                        <a:defRPr sz="980">
                           <a:solidFill>
                             <a:srgbClr val="0F172A"/>
                           </a:solidFill>
@@ -11302,7 +11302,7 @@
                     <a:lstStyle/>
                     <a:p>
                       <a:pPr algn="l">
-                        <a:defRPr sz="1050">
+                        <a:defRPr sz="980">
                           <a:solidFill>
                             <a:srgbClr val="0F172A"/>
                           </a:solidFill>
@@ -11310,7 +11310,7 @@
                         </a:defRPr>
                       </a:pPr>
                       <a:r>
-                        <a:t>偶发异常，要求在 &lt; 500µs [协议目标] 内完成在途传输取消</a:t>
+                        <a:t>偶发异常，要求在 &lt; 500µs [目标值] 内完成在途撤销</a:t>
                       </a:r>
                     </a:p>
                   </a:txBody>
@@ -11326,7 +11326,7 @@
                     <a:lstStyle/>
                     <a:p>
                       <a:pPr algn="l">
-                        <a:defRPr sz="1050">
+                        <a:defRPr sz="980">
                           <a:solidFill>
                             <a:srgbClr val="0F172A"/>
                           </a:solidFill>
@@ -11334,7 +11334,7 @@
                         </a:defRPr>
                       </a:pPr>
                       <a:r>
-                        <a:t>微秒级异步任务撤销与描述符排空 ➔ 催熟通信上下文快速重置与免死锁回收</a:t>
+                        <a:t>微秒级异步任务撤销与描述符排空 ➔ 催熟通信上下文快速重置与回收</a:t>
                       </a:r>
                     </a:p>
                   </a:txBody>
@@ -11764,7 +11764,7 @@
               <a:spcAft>
                 <a:spcPts val="250"/>
               </a:spcAft>
-              <a:defRPr sz="1120" b="1">
+              <a:defRPr sz="1080" b="1">
                 <a:solidFill>
                   <a:srgbClr val="1E3A8A"/>
                 </a:solidFill>
@@ -11772,7 +11772,7 @@
               </a:defRPr>
             </a:pPr>
             <a:r>
-              <a:t>J_i = (a_i, d_i, group_i, pred_i, src_i, dst_i, V_i, E_i, visible_i, fail_i) [设计契约]</a:t>
+              <a:t>J_i = (a_i, d_i, group_i, pred_i, src_i, dst_i, V_i, E_i, visible_i, fail_i)</a:t>
             </a:r>
           </a:p>
           <a:p>
@@ -12042,7 +12042,7 @@
               </a:spcAft>
               <a:defRPr sz="1550" b="1">
                 <a:solidFill>
-                  <a:srgbClr val="1D4ED8"/>
+                  <a:srgbClr val="1E3A8A"/>
                 </a:solidFill>
                 <a:latin typeface="Microsoft YaHei"/>
               </a:defRPr>
@@ -12054,12 +12054,31 @@
           <a:p>
             <a:pPr>
               <a:lnSpc>
-                <a:spcPct val="122000"/>
+                <a:spcPct val="120000"/>
               </a:lnSpc>
               <a:spcAft>
-                <a:spcPts val="400"/>
-              </a:spcAft>
-              <a:defRPr sz="1140" b="1">
+                <a:spcPts val="250"/>
+              </a:spcAft>
+              <a:defRPr sz="1100" b="1">
+                <a:solidFill>
+                  <a:srgbClr val="1E3A8A"/>
+                </a:solidFill>
+                <a:latin typeface="Microsoft YaHei"/>
+              </a:defRPr>
+            </a:pPr>
+            <a:r>
+              <a:t>标准接口契约文本表达：</a:t>
+            </a:r>
+          </a:p>
+          <a:p>
+            <a:pPr>
+              <a:lnSpc>
+                <a:spcPct val="120000"/>
+              </a:lnSpc>
+              <a:spcAft>
+                <a:spcPts val="250"/>
+              </a:spcAft>
+              <a:defRPr sz="1100" b="0">
                 <a:solidFill>
                   <a:srgbClr val="0F172A"/>
                 </a:solidFill>
@@ -12067,18 +12086,37 @@
               </a:defRPr>
             </a:pPr>
             <a:r>
-              <a:t>标准接口契约文本表达：</a:t>
+              <a:t>  “在指定源目标、分段大小、并发组与设备可见性定义下，任务获得不低于 R 的有效带宽、最大排队延迟不高于 θ，允许突发不超过 σ，并严格按任务时限 d_i 报告完成或失败。” [形式化契约定义]</a:t>
             </a:r>
           </a:p>
           <a:p>
             <a:pPr>
               <a:lnSpc>
-                <a:spcPct val="122000"/>
+                <a:spcPct val="120000"/>
               </a:lnSpc>
               <a:spcAft>
-                <a:spcPts val="400"/>
-              </a:spcAft>
-              <a:defRPr sz="1140" b="0">
+                <a:spcPts val="250"/>
+              </a:spcAft>
+              <a:defRPr sz="1100" b="1">
+                <a:solidFill>
+                  <a:srgbClr val="1E3A8A"/>
+                </a:solidFill>
+                <a:latin typeface="Microsoft YaHei"/>
+              </a:defRPr>
+            </a:pPr>
+            <a:r>
+              <a:t>明确双方工程职责边界：</a:t>
+            </a:r>
+          </a:p>
+          <a:p>
+            <a:pPr>
+              <a:lnSpc>
+                <a:spcPct val="120000"/>
+              </a:lnSpc>
+              <a:spcAft>
+                <a:spcPts val="250"/>
+              </a:spcAft>
+              <a:defRPr sz="1100" b="0">
                 <a:solidFill>
                   <a:srgbClr val="0F172A"/>
                 </a:solidFill>
@@ -12086,18 +12124,18 @@
               </a:defRPr>
             </a:pPr>
             <a:r>
-              <a:t>  “在指定源目标、分段大小、并发组与设备可见性定义下，任务获得不低于 R 的有效带宽、最大排队延迟不高于 θ，允许突发不超过 σ，并严格按任务时限 d_i 报告完成或失败。” [形式化契约定义]</a:t>
+              <a:t>  • 自研 KVC 职责：负责哈希检索、选路决策、流量整形与异常回退；</a:t>
             </a:r>
           </a:p>
           <a:p>
             <a:pPr>
               <a:lnSpc>
-                <a:spcPct val="122000"/>
+                <a:spcPct val="120000"/>
               </a:lnSpc>
               <a:spcAft>
-                <a:spcPts val="400"/>
-              </a:spcAft>
-              <a:defRPr sz="1140" b="1">
+                <a:spcPts val="250"/>
+              </a:spcAft>
+              <a:defRPr sz="1100" b="0">
                 <a:solidFill>
                   <a:srgbClr val="0F172A"/>
                 </a:solidFill>
@@ -12105,58 +12143,20 @@
               </a:defRPr>
             </a:pPr>
             <a:r>
-              <a:t>明确双方工程职责边界：</a:t>
+              <a:t>  • KPCL 底座职责：负责用户态无锁提交、硬件 DMA 直达与队列映射；</a:t>
             </a:r>
           </a:p>
           <a:p>
             <a:pPr>
               <a:lnSpc>
-                <a:spcPct val="122000"/>
+                <a:spcPct val="120000"/>
               </a:lnSpc>
               <a:spcAft>
-                <a:spcPts val="400"/>
-              </a:spcAft>
-              <a:defRPr sz="1140" b="0">
-                <a:solidFill>
-                  <a:srgbClr val="0F172A"/>
-                </a:solidFill>
-                <a:latin typeface="Microsoft YaHei"/>
-              </a:defRPr>
-            </a:pPr>
-            <a:r>
-              <a:t>  • 自研 KVC 职责：负责哈希检索、选路决策、流量整形与异常回退；</a:t>
-            </a:r>
-          </a:p>
-          <a:p>
-            <a:pPr>
-              <a:lnSpc>
-                <a:spcPct val="122000"/>
-              </a:lnSpc>
-              <a:spcAft>
-                <a:spcPts val="400"/>
-              </a:spcAft>
-              <a:defRPr sz="1140" b="0">
-                <a:solidFill>
-                  <a:srgbClr val="0F172A"/>
-                </a:solidFill>
-                <a:latin typeface="Microsoft YaHei"/>
-              </a:defRPr>
-            </a:pPr>
-            <a:r>
-              <a:t>  • KPCL 底座职责：负责用户态无锁提交、硬件 DMA 直达与队列映射；</a:t>
-            </a:r>
-          </a:p>
-          <a:p>
-            <a:pPr>
-              <a:lnSpc>
-                <a:spcPct val="122000"/>
-              </a:lnSpc>
-              <a:spcAft>
-                <a:spcPts val="400"/>
-              </a:spcAft>
-              <a:defRPr sz="1140" b="0">
-                <a:solidFill>
-                  <a:srgbClr val="0F172A"/>
+                <a:spcPts val="250"/>
+              </a:spcAft>
+              <a:defRPr sz="1100" b="1">
+                <a:solidFill>
+                  <a:srgbClr val="1E3A8A"/>
                 </a:solidFill>
                 <a:latin typeface="Microsoft YaHei"/>
               </a:defRPr>
@@ -12582,7 +12582,7 @@
         <p:spPr>
           <a:xfrm>
             <a:off x="548640" y="1115568"/>
-            <a:ext cx="2651760" cy="3566160"/>
+            <a:ext cx="2670048" cy="3566160"/>
           </a:xfrm>
           <a:prstGeom prst="roundRect">
             <a:avLst>
@@ -12628,8 +12628,8 @@
         </p:nvSpPr>
         <p:spPr>
           <a:xfrm>
-            <a:off x="621792" y="1207008"/>
-            <a:ext cx="2505456" cy="3383280"/>
+            <a:off x="603504" y="1207008"/>
+            <a:ext cx="2560320" cy="3383280"/>
           </a:xfrm>
           <a:prstGeom prst="rect">
             <a:avLst/>
@@ -12662,7 +12662,7 @@
               <a:spcAft>
                 <a:spcPts val="800"/>
               </a:spcAft>
-              <a:defRPr sz="1120" b="1">
+              <a:defRPr sz="1100" b="1">
                 <a:solidFill>
                   <a:srgbClr val="0F172A"/>
                 </a:solidFill>
@@ -12670,7 +12670,7 @@
               </a:defRPr>
             </a:pPr>
             <a:r>
-              <a:t>PVT-00 业务复用评估 [业务前提验证]</a:t>
+              <a:t>PVT-00 业务复用评估 [前提验证]</a:t>
             </a:r>
           </a:p>
           <a:p>
@@ -12681,7 +12681,7 @@
               <a:spcAft>
                 <a:spcPts val="400"/>
               </a:spcAft>
-              <a:defRPr sz="1080">
+              <a:defRPr sz="960">
                 <a:solidFill>
                   <a:srgbClr val="0F172A"/>
                 </a:solidFill>
@@ -12689,7 +12689,7 @@
               </a:defRPr>
             </a:pPr>
             <a:r>
-              <a:t>• 测定生产命中率与自然前缀分布 [实测目标]</a:t>
+              <a:t>• [实测] 测定生产命中率与前缀分布</a:t>
             </a:r>
           </a:p>
           <a:p>
@@ -12700,7 +12700,7 @@
               <a:spcAft>
                 <a:spcPts val="400"/>
               </a:spcAft>
-              <a:defRPr sz="1080">
+              <a:defRPr sz="960">
                 <a:solidFill>
                   <a:srgbClr val="0F172A"/>
                 </a:solidFill>
@@ -12708,7 +12708,7 @@
               </a:defRPr>
             </a:pPr>
             <a:r>
-              <a:t>• 探明 Saved-Prefill 节省物理上限 [实测目标]</a:t>
+              <a:t>• [实测] 探明 Saved-Prefill 物理上限</a:t>
             </a:r>
           </a:p>
           <a:p>
@@ -12719,7 +12719,7 @@
               <a:spcAft>
                 <a:spcPts val="400"/>
               </a:spcAft>
-              <a:defRPr sz="1080">
+              <a:defRPr sz="960">
                 <a:solidFill>
                   <a:srgbClr val="0F172A"/>
                 </a:solidFill>
@@ -12727,7 +12727,7 @@
               </a:defRPr>
             </a:pPr>
             <a:r>
-              <a:t>• 测定 URMA 单请求查询时延极限 [实测目标]</a:t>
+              <a:t>• [实测] 测定 URMA 单请求时延极限</a:t>
             </a:r>
           </a:p>
           <a:p>
@@ -12738,7 +12738,7 @@
               <a:spcAft>
                 <a:spcPts val="400"/>
               </a:spcAft>
-              <a:defRPr sz="1080">
+              <a:defRPr sz="960">
                 <a:solidFill>
                   <a:srgbClr val="0F172A"/>
                 </a:solidFill>
@@ -12746,7 +12746,7 @@
               </a:defRPr>
             </a:pPr>
             <a:r>
-              <a:t>• 对应模型：收敛 α 与 f 真实参数 [闭环验证]</a:t>
+              <a:t>• [收敛] 理论模型参数 α 与 f 实测收敛</a:t>
             </a:r>
           </a:p>
         </p:txBody>
@@ -12760,7 +12760,7 @@
         <p:spPr>
           <a:xfrm>
             <a:off x="3364992" y="1115568"/>
-            <a:ext cx="2651760" cy="3566160"/>
+            <a:ext cx="2670048" cy="3566160"/>
           </a:xfrm>
           <a:prstGeom prst="roundRect">
             <a:avLst>
@@ -12806,8 +12806,8 @@
         </p:nvSpPr>
         <p:spPr>
           <a:xfrm>
-            <a:off x="3438144" y="1207008"/>
-            <a:ext cx="2505456" cy="3383280"/>
+            <a:off x="3419856" y="1207008"/>
+            <a:ext cx="2560320" cy="3383280"/>
           </a:xfrm>
           <a:prstGeom prst="rect">
             <a:avLst/>
@@ -12840,7 +12840,7 @@
               <a:spcAft>
                 <a:spcPts val="800"/>
               </a:spcAft>
-              <a:defRPr sz="1120" b="1">
+              <a:defRPr sz="1100" b="1">
                 <a:solidFill>
                   <a:srgbClr val="0F172A"/>
                 </a:solidFill>
@@ -12848,7 +12848,7 @@
               </a:defRPr>
             </a:pPr>
             <a:r>
-              <a:t>PVT-01, 02, 06 [底座打通目标]</a:t>
+              <a:t>PVT-01, 02, 06 [底座打通]</a:t>
             </a:r>
           </a:p>
           <a:p>
@@ -12859,7 +12859,7 @@
               <a:spcAft>
                 <a:spcPts val="400"/>
               </a:spcAft>
-              <a:defRPr sz="1080">
+              <a:defRPr sz="960">
                 <a:solidFill>
                   <a:srgbClr val="0F172A"/>
                 </a:solidFill>
@@ -12867,7 +12867,7 @@
               </a:defRPr>
             </a:pPr>
             <a:r>
-              <a:t>• PVT-01: 验证零拷贝底座物理带宽 [实测目标]</a:t>
+              <a:t>• [实测] 验证零拷贝物理带宽 (PVT-01)</a:t>
             </a:r>
           </a:p>
           <a:p>
@@ -12878,7 +12878,7 @@
               <a:spcAft>
                 <a:spcPts val="400"/>
               </a:spcAft>
-              <a:defRPr sz="1080">
+              <a:defRPr sz="960">
                 <a:solidFill>
                   <a:srgbClr val="0F172A"/>
                 </a:solidFill>
@@ -12886,7 +12886,7 @@
               </a:defRPr>
             </a:pPr>
             <a:r>
-              <a:t>• PVT-02: 流水重叠率达到 ≥ 60% [设计目标]</a:t>
+              <a:t>• [目标] 流水重叠率达 ≥ 60% (PVT-02)</a:t>
             </a:r>
           </a:p>
           <a:p>
@@ -12897,7 +12897,7 @@
               <a:spcAft>
                 <a:spcPts val="400"/>
               </a:spcAft>
-              <a:defRPr sz="1080">
+              <a:defRPr sz="960">
                 <a:solidFill>
                   <a:srgbClr val="0F172A"/>
                 </a:solidFill>
@@ -12905,7 +12905,7 @@
               </a:defRPr>
             </a:pPr>
             <a:r>
-              <a:t>• PVT-06: 6维语义核验与多卡同步 [功能目标]</a:t>
+              <a:t>• [核验] 6维语义与多卡同步 (PVT-06)</a:t>
             </a:r>
           </a:p>
           <a:p>
@@ -12916,7 +12916,7 @@
               <a:spcAft>
                 <a:spcPts val="400"/>
               </a:spcAft>
-              <a:defRPr sz="1080">
+              <a:defRPr sz="960">
                 <a:solidFill>
                   <a:srgbClr val="0F172A"/>
                 </a:solidFill>
@@ -12924,7 +12924,7 @@
               </a:defRPr>
             </a:pPr>
             <a:r>
-              <a:t>• 催熟 KPCL: F1控制与F2/F3直达 [协同目标]</a:t>
+              <a:t>• [催熟] KPCL F1 控制与 F2/F3 直达</a:t>
             </a:r>
           </a:p>
         </p:txBody>
@@ -12938,7 +12938,7 @@
         <p:spPr>
           <a:xfrm>
             <a:off x="6181344" y="1115568"/>
-            <a:ext cx="2651760" cy="3566160"/>
+            <a:ext cx="2670048" cy="3566160"/>
           </a:xfrm>
           <a:prstGeom prst="roundRect">
             <a:avLst>
@@ -12984,8 +12984,8 @@
         </p:nvSpPr>
         <p:spPr>
           <a:xfrm>
-            <a:off x="6254496" y="1207008"/>
-            <a:ext cx="2505456" cy="3383280"/>
+            <a:off x="6236208" y="1207008"/>
+            <a:ext cx="2560320" cy="3383280"/>
           </a:xfrm>
           <a:prstGeom prst="rect">
             <a:avLst/>
@@ -13018,7 +13018,7 @@
               <a:spcAft>
                 <a:spcPts val="800"/>
               </a:spcAft>
-              <a:defRPr sz="1120" b="1">
+              <a:defRPr sz="1100" b="1">
                 <a:solidFill>
                   <a:srgbClr val="0F172A"/>
                 </a:solidFill>
@@ -13026,7 +13026,7 @@
               </a:defRPr>
             </a:pPr>
             <a:r>
-              <a:t>PVT-03, 04, 05 [算法决策目标]</a:t>
+              <a:t>PVT-03, 04, 05 [算法决策]</a:t>
             </a:r>
           </a:p>
           <a:p>
@@ -13037,7 +13037,7 @@
               <a:spcAft>
                 <a:spcPts val="400"/>
               </a:spcAft>
-              <a:defRPr sz="1080">
+              <a:defRPr sz="960">
                 <a:solidFill>
                   <a:srgbClr val="0F172A"/>
                 </a:solidFill>
@@ -13045,7 +13045,7 @@
               </a:defRPr>
             </a:pPr>
             <a:r>
-              <a:t>• PVT-03: 测定远端直读适用边界 [实测目标]</a:t>
+              <a:t>• [实测] 测定远端直读适用边界 (PVT-03)</a:t>
             </a:r>
           </a:p>
           <a:p>
@@ -13056,7 +13056,7 @@
               <a:spcAft>
                 <a:spcPts val="400"/>
               </a:spcAft>
-              <a:defRPr sz="1080">
+              <a:defRPr sz="960">
                 <a:solidFill>
                   <a:srgbClr val="0F172A"/>
                 </a:solidFill>
@@ -13064,7 +13064,7 @@
               </a:defRPr>
             </a:pPr>
             <a:r>
-              <a:t>• PVT-04: 选路准确率&gt;90%与回退 [算法目标]</a:t>
+              <a:t>• [目标] 选路准确率 &gt;90% 回退 (PVT-04)</a:t>
             </a:r>
           </a:p>
           <a:p>
@@ -13075,7 +13075,7 @@
               <a:spcAft>
                 <a:spcPts val="400"/>
               </a:spcAft>
-              <a:defRPr sz="1080">
+              <a:defRPr sz="960">
                 <a:solidFill>
                   <a:srgbClr val="0F172A"/>
                 </a:solidFill>
@@ -13083,7 +13083,7 @@
               </a:defRPr>
             </a:pPr>
             <a:r>
-              <a:t>• PVT-05: 显存-SSD 裸盘直达扩容 [实测目标]</a:t>
+              <a:t>• [实测] 显存-SSD 直达扩容 (PVT-05)</a:t>
             </a:r>
           </a:p>
           <a:p>
@@ -13094,7 +13094,7 @@
               <a:spcAft>
                 <a:spcPts val="400"/>
               </a:spcAft>
-              <a:defRPr sz="1080">
+              <a:defRPr sz="960">
                 <a:solidFill>
                   <a:srgbClr val="0F172A"/>
                 </a:solidFill>
@@ -13102,7 +13102,7 @@
               </a:defRPr>
             </a:pPr>
             <a:r>
-              <a:t>• 催熟 KPCL: F4协同与F8极速撤销 [协同目标]</a:t>
+              <a:t>• [催熟] KPCL F4 协同与 F8 极速撤销</a:t>
             </a:r>
           </a:p>
         </p:txBody>
@@ -13116,7 +13116,7 @@
         <p:spPr>
           <a:xfrm>
             <a:off x="8997696" y="1115568"/>
-            <a:ext cx="2651760" cy="3566160"/>
+            <a:ext cx="2670048" cy="3566160"/>
           </a:xfrm>
           <a:prstGeom prst="roundRect">
             <a:avLst>
@@ -13162,8 +13162,8 @@
         </p:nvSpPr>
         <p:spPr>
           <a:xfrm>
-            <a:off x="9070848" y="1207008"/>
-            <a:ext cx="2505456" cy="3383280"/>
+            <a:off x="9052560" y="1207008"/>
+            <a:ext cx="2560320" cy="3383280"/>
           </a:xfrm>
           <a:prstGeom prst="rect">
             <a:avLst/>
@@ -13196,7 +13196,7 @@
               <a:spcAft>
                 <a:spcPts val="800"/>
               </a:spcAft>
-              <a:defRPr sz="1120" b="1">
+              <a:defRPr sz="1100" b="1">
                 <a:solidFill>
                   <a:srgbClr val="0F172A"/>
                 </a:solidFill>
@@ -13204,7 +13204,7 @@
               </a:defRPr>
             </a:pPr>
             <a:r>
-              <a:t>PVT-07, 10, CVT-01 [立项核心验收目标]</a:t>
+              <a:t>PVT-07, 10, CVT [核心验收]</a:t>
             </a:r>
           </a:p>
           <a:p>
@@ -13215,7 +13215,7 @@
               <a:spcAft>
                 <a:spcPts val="400"/>
               </a:spcAft>
-              <a:defRPr sz="1080">
+              <a:defRPr sz="960">
                 <a:solidFill>
                   <a:srgbClr val="0F172A"/>
                 </a:solidFill>
@@ -13223,7 +13223,7 @@
               </a:defRPr>
             </a:pPr>
             <a:r>
-              <a:t>• PVT-07: 混压 TPOT 性能干扰&lt;3% [核心门禁目标]</a:t>
+              <a:t>• [门禁] 混压 TPOT 干扰 &lt; 3% (PVT-07)</a:t>
             </a:r>
           </a:p>
           <a:p>
@@ -13234,7 +13234,7 @@
               <a:spcAft>
                 <a:spcPts val="400"/>
               </a:spcAft>
-              <a:defRPr sz="1080">
+              <a:defRPr sz="960">
                 <a:solidFill>
                   <a:srgbClr val="0F172A"/>
                 </a:solidFill>
@@ -13242,7 +13242,7 @@
               </a:defRPr>
             </a:pPr>
             <a:r>
-              <a:t>• PVT-10: 偏斜消除 (Skew &lt; 1.15) [核心门禁目标]</a:t>
+              <a:t>• [门禁] 消除偏斜 Skew &lt; 1.15 (PVT-10)</a:t>
             </a:r>
           </a:p>
           <a:p>
@@ -13253,7 +13253,7 @@
               <a:spcAft>
                 <a:spcPts val="400"/>
               </a:spcAft>
-              <a:defRPr sz="1080">
+              <a:defRPr sz="960">
                 <a:solidFill>
                   <a:srgbClr val="0F172A"/>
                 </a:solidFill>
@@ -13261,7 +13261,7 @@
               </a:defRPr>
             </a:pPr>
             <a:r>
-              <a:t>• CVT-01: 软件RCU证伪硬件重映射 [架构证伪目标]</a:t>
+              <a:t>• [证伪] 软件 RCU 证伪硬件映射 (CVT-01)</a:t>
             </a:r>
           </a:p>
           <a:p>
@@ -13272,7 +13272,7 @@
               <a:spcAft>
                 <a:spcPts val="400"/>
               </a:spcAft>
-              <a:defRPr sz="1080">
+              <a:defRPr sz="960">
                 <a:solidFill>
                   <a:srgbClr val="0F172A"/>
                 </a:solidFill>
@@ -13280,7 +13280,7 @@
               </a:defRPr>
             </a:pPr>
             <a:r>
-              <a:t>• 验收 KPCL: 成熟商用整机提速 [最终交付目标]</a:t>
+              <a:t>• [验收] KPCL 成熟商用整机提速交付</a:t>
             </a:r>
           </a:p>
         </p:txBody>
@@ -14515,10 +14515,10 @@
                 <a:tableStyleId>{5C22544A-7EE6-4342-B048-85BDC9FD1C3A}</a:tableStyleId>
               </a:tblPr>
               <a:tblGrid>
-                <a:gridCol w="3017520"/>
-                <a:gridCol w="2651760"/>
-                <a:gridCol w="3108960"/>
-                <a:gridCol w="2316175"/>
+                <a:gridCol w="2743200"/>
+                <a:gridCol w="2560320"/>
+                <a:gridCol w="2926080"/>
+                <a:gridCol w="2864815"/>
               </a:tblGrid>
               <a:tr h="514350">
                 <a:tc>
@@ -14625,7 +14625,7 @@
                     <a:lstStyle/>
                     <a:p>
                       <a:pPr algn="ctr">
-                        <a:defRPr sz="1050" b="1">
+                        <a:defRPr sz="980" b="1">
                           <a:solidFill>
                             <a:srgbClr val="0F172A"/>
                           </a:solidFill>
@@ -14649,7 +14649,7 @@
                     <a:lstStyle/>
                     <a:p>
                       <a:pPr algn="l">
-                        <a:defRPr sz="1050">
+                        <a:defRPr sz="980">
                           <a:solidFill>
                             <a:srgbClr val="0F172A"/>
                           </a:solidFill>
@@ -14673,7 +14673,7 @@
                     <a:lstStyle/>
                     <a:p>
                       <a:pPr algn="l">
-                        <a:defRPr sz="1050">
+                        <a:defRPr sz="980">
                           <a:solidFill>
                             <a:srgbClr val="0F172A"/>
                           </a:solidFill>
@@ -14697,7 +14697,7 @@
                     <a:lstStyle/>
                     <a:p>
                       <a:pPr algn="l">
-                        <a:defRPr sz="1050">
+                        <a:defRPr sz="980">
                           <a:solidFill>
                             <a:srgbClr val="0F172A"/>
                           </a:solidFill>
@@ -14723,7 +14723,7 @@
                     <a:lstStyle/>
                     <a:p>
                       <a:pPr algn="ctr">
-                        <a:defRPr sz="1050" b="1">
+                        <a:defRPr sz="980" b="1">
                           <a:solidFill>
                             <a:srgbClr val="0F172A"/>
                           </a:solidFill>
@@ -14731,7 +14731,7 @@
                         </a:defRPr>
                       </a:pPr>
                       <a:r>
-                        <a:t>质疑二：仅有 18µs 查询数据（占比&lt;0.1%）如何证明整机大幅提速？</a:t>
+                        <a:t>质疑二：仅有 18µs 查询数据 (占比&lt;0.1%) 如何证明整机大幅提速？</a:t>
                       </a:r>
                     </a:p>
                   </a:txBody>
@@ -14747,7 +14747,7 @@
                     <a:lstStyle/>
                     <a:p>
                       <a:pPr algn="l">
-                        <a:defRPr sz="1050">
+                        <a:defRPr sz="980">
                           <a:solidFill>
                             <a:srgbClr val="0F172A"/>
                           </a:solidFill>
@@ -14755,7 +14755,7 @@
                         </a:defRPr>
                       </a:pPr>
                       <a:r>
-                        <a:t>16K 前缀查询实测 URMA 18µs [实测微基准]，占 250ms TTFT [假设值] 的 0.01%，直接改善仅 0.004% [推导值]。</a:t>
+                        <a:t>16K 前缀查询实测 URMA 18µs [实测]，占 250ms TTFT [假设] 仅 0.01%，直接提速仅 0.004% [推导值]。</a:t>
                       </a:r>
                     </a:p>
                   </a:txBody>
@@ -14771,7 +14771,7 @@
                     <a:lstStyle/>
                     <a:p>
                       <a:pPr algn="l">
-                        <a:defRPr sz="1050">
+                        <a:defRPr sz="980">
                           <a:solidFill>
                             <a:srgbClr val="0F172A"/>
                           </a:solidFill>
@@ -14795,7 +14795,7 @@
                     <a:lstStyle/>
                     <a:p>
                       <a:pPr algn="l">
-                        <a:defRPr sz="1050">
+                        <a:defRPr sz="980">
                           <a:solidFill>
                             <a:srgbClr val="0F172A"/>
                           </a:solidFill>
@@ -14821,7 +14821,7 @@
                     <a:lstStyle/>
                     <a:p>
                       <a:pPr algn="ctr">
-                        <a:defRPr sz="1050" b="1">
+                        <a:defRPr sz="980" b="1">
                           <a:solidFill>
                             <a:srgbClr val="0F172A"/>
                           </a:solidFill>
@@ -14845,7 +14845,7 @@
                     <a:lstStyle/>
                     <a:p>
                       <a:pPr algn="l">
-                        <a:defRPr sz="1050">
+                        <a:defRPr sz="980">
                           <a:solidFill>
                             <a:srgbClr val="0F172A"/>
                           </a:solidFill>
@@ -14869,7 +14869,7 @@
                     <a:lstStyle/>
                     <a:p>
                       <a:pPr algn="l">
-                        <a:defRPr sz="1050">
+                        <a:defRPr sz="980">
                           <a:solidFill>
                             <a:srgbClr val="0F172A"/>
                           </a:solidFill>
@@ -14893,7 +14893,7 @@
                     <a:lstStyle/>
                     <a:p>
                       <a:pPr algn="l">
-                        <a:defRPr sz="1050">
+                        <a:defRPr sz="980">
                           <a:solidFill>
                             <a:srgbClr val="0F172A"/>
                           </a:solidFill>
@@ -14901,7 +14901,7 @@
                         </a:defRPr>
                       </a:pPr>
                       <a:r>
-                        <a:t>以真实大模型极端混压场景为通信库提供实战靶场，设立 3 条 No-Go 止损线。</a:t>
+                        <a:t>以极端在线推理混压为底座提供实战靶场，设立 3 条硬核 No-Go 止损线。</a:t>
                       </a:r>
                     </a:p>
                   </a:txBody>
@@ -14924,8 +14924,8 @@
         </p:nvSpPr>
         <p:spPr>
           <a:xfrm>
-            <a:off x="548640" y="3246120"/>
-            <a:ext cx="3547872" cy="2560320"/>
+            <a:off x="548640" y="3520440"/>
+            <a:ext cx="3504895" cy="2286000"/>
           </a:xfrm>
           <a:prstGeom prst="roundRect">
             <a:avLst>
@@ -14971,8 +14971,8 @@
         </p:nvSpPr>
         <p:spPr>
           <a:xfrm>
-            <a:off x="713232" y="3337560"/>
-            <a:ext cx="3218688" cy="2377440"/>
+            <a:off x="685800" y="3611880"/>
+            <a:ext cx="3230575" cy="2103120"/>
           </a:xfrm>
           <a:prstGeom prst="rect">
             <a:avLst/>
@@ -14987,9 +14987,9 @@
           <a:p>
             <a:pPr>
               <a:spcAft>
-                <a:spcPts val="800"/>
-              </a:spcAft>
-              <a:defRPr sz="1550" b="1">
+                <a:spcPts val="500"/>
+              </a:spcAft>
+              <a:defRPr sz="1500" b="1">
                 <a:solidFill>
                   <a:srgbClr val="1D4ED8"/>
                 </a:solidFill>
@@ -15003,12 +15003,12 @@
           <a:p>
             <a:pPr>
               <a:lnSpc>
-                <a:spcPct val="125000"/>
+                <a:spcPct val="118000"/>
               </a:lnSpc>
               <a:spcAft>
-                <a:spcPts val="500"/>
-              </a:spcAft>
-              <a:defRPr sz="1160">
+                <a:spcPts val="250"/>
+              </a:spcAft>
+              <a:defRPr sz="1060">
                 <a:solidFill>
                   <a:srgbClr val="0F172A"/>
                 </a:solidFill>
@@ -15022,12 +15022,12 @@
           <a:p>
             <a:pPr>
               <a:lnSpc>
-                <a:spcPct val="125000"/>
+                <a:spcPct val="118000"/>
               </a:lnSpc>
               <a:spcAft>
-                <a:spcPts val="500"/>
-              </a:spcAft>
-              <a:defRPr sz="1160">
+                <a:spcPts val="250"/>
+              </a:spcAft>
+              <a:defRPr sz="1060">
                 <a:solidFill>
                   <a:srgbClr val="0F172A"/>
                 </a:solidFill>
@@ -15041,12 +15041,12 @@
           <a:p>
             <a:pPr>
               <a:lnSpc>
-                <a:spcPct val="125000"/>
+                <a:spcPct val="118000"/>
               </a:lnSpc>
               <a:spcAft>
-                <a:spcPts val="500"/>
-              </a:spcAft>
-              <a:defRPr sz="1160">
+                <a:spcPts val="250"/>
+              </a:spcAft>
+              <a:defRPr sz="1060">
                 <a:solidFill>
                   <a:srgbClr val="0F172A"/>
                 </a:solidFill>
@@ -15067,8 +15067,8 @@
         </p:nvSpPr>
         <p:spPr>
           <a:xfrm>
-            <a:off x="4315968" y="3246120"/>
-            <a:ext cx="3547872" cy="2560320"/>
+            <a:off x="4343400" y="3520440"/>
+            <a:ext cx="3504895" cy="2286000"/>
           </a:xfrm>
           <a:prstGeom prst="roundRect">
             <a:avLst>
@@ -15114,8 +15114,8 @@
         </p:nvSpPr>
         <p:spPr>
           <a:xfrm>
-            <a:off x="4480560" y="3337560"/>
-            <a:ext cx="3218688" cy="2377440"/>
+            <a:off x="4480560" y="3611880"/>
+            <a:ext cx="3230575" cy="2103120"/>
           </a:xfrm>
           <a:prstGeom prst="rect">
             <a:avLst/>
@@ -15130,9 +15130,9 @@
           <a:p>
             <a:pPr>
               <a:spcAft>
-                <a:spcPts val="800"/>
-              </a:spcAft>
-              <a:defRPr sz="1550" b="1">
+                <a:spcPts val="500"/>
+              </a:spcAft>
+              <a:defRPr sz="1500" b="1">
                 <a:solidFill>
                   <a:srgbClr val="047857"/>
                 </a:solidFill>
@@ -15146,12 +15146,12 @@
           <a:p>
             <a:pPr>
               <a:lnSpc>
-                <a:spcPct val="125000"/>
+                <a:spcPct val="118000"/>
               </a:lnSpc>
               <a:spcAft>
-                <a:spcPts val="500"/>
-              </a:spcAft>
-              <a:defRPr sz="1160">
+                <a:spcPts val="250"/>
+              </a:spcAft>
+              <a:defRPr sz="1060">
                 <a:solidFill>
                   <a:srgbClr val="0F172A"/>
                 </a:solidFill>
@@ -15159,18 +15159,18 @@
               </a:defRPr>
             </a:pPr>
             <a:r>
-              <a:t>• TTFT 路径：逐层流水掩盖 98.7% 传输 [模型推导]，首字提速 47.4% [模型推导]；</a:t>
+              <a:t>• TTFT 路径：逐层流水掩盖 98.7% 传输，首字提速 47.4% [模型推导]；</a:t>
             </a:r>
           </a:p>
           <a:p>
             <a:pPr>
               <a:lnSpc>
-                <a:spcPct val="125000"/>
+                <a:spcPct val="118000"/>
               </a:lnSpc>
               <a:spcAft>
-                <a:spcPts val="500"/>
-              </a:spcAft>
-              <a:defRPr sz="1160">
+                <a:spcPts val="250"/>
+              </a:spcAft>
+              <a:defRPr sz="1060">
                 <a:solidFill>
                   <a:srgbClr val="0F172A"/>
                 </a:solidFill>
@@ -15184,12 +15184,12 @@
           <a:p>
             <a:pPr>
               <a:lnSpc>
-                <a:spcPct val="125000"/>
+                <a:spcPct val="118000"/>
               </a:lnSpc>
               <a:spcAft>
-                <a:spcPts val="500"/>
-              </a:spcAft>
-              <a:defRPr sz="1160">
+                <a:spcPts val="250"/>
+              </a:spcAft>
+              <a:defRPr sz="1060">
                 <a:solidFill>
                   <a:srgbClr val="0F172A"/>
                 </a:solidFill>
@@ -15210,8 +15210,8 @@
         </p:nvSpPr>
         <p:spPr>
           <a:xfrm>
-            <a:off x="8083296" y="3246120"/>
-            <a:ext cx="3547872" cy="2560320"/>
+            <a:off x="8138160" y="3520440"/>
+            <a:ext cx="3504895" cy="2286000"/>
           </a:xfrm>
           <a:prstGeom prst="roundRect">
             <a:avLst>
@@ -15257,8 +15257,8 @@
         </p:nvSpPr>
         <p:spPr>
           <a:xfrm>
-            <a:off x="8247888" y="3337560"/>
-            <a:ext cx="3218688" cy="2377440"/>
+            <a:off x="8275320" y="3611880"/>
+            <a:ext cx="3230575" cy="2103120"/>
           </a:xfrm>
           <a:prstGeom prst="rect">
             <a:avLst/>
@@ -15273,9 +15273,9 @@
           <a:p>
             <a:pPr>
               <a:spcAft>
-                <a:spcPts val="800"/>
-              </a:spcAft>
-              <a:defRPr sz="1550" b="1">
+                <a:spcPts val="500"/>
+              </a:spcAft>
+              <a:defRPr sz="1500" b="1">
                 <a:solidFill>
                   <a:srgbClr val="B45309"/>
                 </a:solidFill>
@@ -15289,12 +15289,12 @@
           <a:p>
             <a:pPr>
               <a:lnSpc>
-                <a:spcPct val="125000"/>
+                <a:spcPct val="118000"/>
               </a:lnSpc>
               <a:spcAft>
-                <a:spcPts val="500"/>
-              </a:spcAft>
-              <a:defRPr sz="1160">
+                <a:spcPts val="250"/>
+              </a:spcAft>
+              <a:defRPr sz="1060">
                 <a:solidFill>
                   <a:srgbClr val="0F172A"/>
                 </a:solidFill>
@@ -15308,12 +15308,12 @@
           <a:p>
             <a:pPr>
               <a:lnSpc>
-                <a:spcPct val="125000"/>
+                <a:spcPct val="118000"/>
               </a:lnSpc>
               <a:spcAft>
-                <a:spcPts val="500"/>
-              </a:spcAft>
-              <a:defRPr sz="1160">
+                <a:spcPts val="250"/>
+              </a:spcAft>
+              <a:defRPr sz="1060">
                 <a:solidFill>
                   <a:srgbClr val="0F172A"/>
                 </a:solidFill>
@@ -15327,12 +15327,12 @@
           <a:p>
             <a:pPr>
               <a:lnSpc>
-                <a:spcPct val="125000"/>
+                <a:spcPct val="118000"/>
               </a:lnSpc>
               <a:spcAft>
-                <a:spcPts val="500"/>
-              </a:spcAft>
-              <a:defRPr sz="1160">
+                <a:spcPts val="250"/>
+              </a:spcAft>
+              <a:defRPr sz="1060">
                 <a:solidFill>
                   <a:srgbClr val="0F172A"/>
                 </a:solidFill>
@@ -15677,7 +15677,7 @@
         <p:spPr>
           <a:xfrm>
             <a:off x="548640" y="1115568"/>
-            <a:ext cx="3547872" cy="4114800"/>
+            <a:ext cx="3504895" cy="4114800"/>
           </a:xfrm>
           <a:prstGeom prst="roundRect">
             <a:avLst>
@@ -15724,7 +15724,7 @@
         <p:spPr>
           <a:xfrm>
             <a:off x="713232" y="1243584"/>
-            <a:ext cx="3218688" cy="3886200"/>
+            <a:ext cx="3175711" cy="3840480"/>
           </a:xfrm>
           <a:prstGeom prst="rect">
             <a:avLst/>
@@ -15755,12 +15755,12 @@
           <a:p>
             <a:pPr>
               <a:lnSpc>
-                <a:spcPct val="126000"/>
+                <a:spcPct val="125000"/>
               </a:lnSpc>
               <a:spcAft>
-                <a:spcPts val="700"/>
-              </a:spcAft>
-              <a:defRPr sz="1180">
+                <a:spcPts val="800"/>
+              </a:spcAft>
+              <a:defRPr sz="1160">
                 <a:solidFill>
                   <a:srgbClr val="0F172A"/>
                 </a:solidFill>
@@ -15774,12 +15774,12 @@
           <a:p>
             <a:pPr>
               <a:lnSpc>
-                <a:spcPct val="126000"/>
+                <a:spcPct val="125000"/>
               </a:lnSpc>
               <a:spcAft>
-                <a:spcPts val="700"/>
-              </a:spcAft>
-              <a:defRPr sz="1180">
+                <a:spcPts val="800"/>
+              </a:spcAft>
+              <a:defRPr sz="1160">
                 <a:solidFill>
                   <a:srgbClr val="0F172A"/>
                 </a:solidFill>
@@ -15793,12 +15793,12 @@
           <a:p>
             <a:pPr>
               <a:lnSpc>
-                <a:spcPct val="126000"/>
+                <a:spcPct val="125000"/>
               </a:lnSpc>
               <a:spcAft>
-                <a:spcPts val="700"/>
-              </a:spcAft>
-              <a:defRPr sz="1180">
+                <a:spcPts val="800"/>
+              </a:spcAft>
+              <a:defRPr sz="1160">
                 <a:solidFill>
                   <a:srgbClr val="0F172A"/>
                 </a:solidFill>
@@ -15812,12 +15812,12 @@
           <a:p>
             <a:pPr>
               <a:lnSpc>
-                <a:spcPct val="126000"/>
+                <a:spcPct val="125000"/>
               </a:lnSpc>
               <a:spcAft>
-                <a:spcPts val="700"/>
-              </a:spcAft>
-              <a:defRPr sz="1180">
+                <a:spcPts val="800"/>
+              </a:spcAft>
+              <a:defRPr sz="1160">
                 <a:solidFill>
                   <a:srgbClr val="0F172A"/>
                 </a:solidFill>
@@ -15838,8 +15838,8 @@
         </p:nvSpPr>
         <p:spPr>
           <a:xfrm>
-            <a:off x="4315968" y="1115568"/>
-            <a:ext cx="3547872" cy="4114800"/>
+            <a:off x="4343400" y="1115568"/>
+            <a:ext cx="3504895" cy="4114800"/>
           </a:xfrm>
           <a:prstGeom prst="roundRect">
             <a:avLst>
@@ -15885,8 +15885,8 @@
         </p:nvSpPr>
         <p:spPr>
           <a:xfrm>
-            <a:off x="4480560" y="1243584"/>
-            <a:ext cx="3218688" cy="3886200"/>
+            <a:off x="4507992" y="1243584"/>
+            <a:ext cx="3175711" cy="3840480"/>
           </a:xfrm>
           <a:prstGeom prst="rect">
             <a:avLst/>
@@ -15917,12 +15917,12 @@
           <a:p>
             <a:pPr>
               <a:lnSpc>
-                <a:spcPct val="126000"/>
+                <a:spcPct val="125000"/>
               </a:lnSpc>
               <a:spcAft>
-                <a:spcPts val="700"/>
-              </a:spcAft>
-              <a:defRPr sz="1180">
+                <a:spcPts val="800"/>
+              </a:spcAft>
+              <a:defRPr sz="1160">
                 <a:solidFill>
                   <a:srgbClr val="0F172A"/>
                 </a:solidFill>
@@ -15936,12 +15936,12 @@
           <a:p>
             <a:pPr>
               <a:lnSpc>
-                <a:spcPct val="126000"/>
+                <a:spcPct val="125000"/>
               </a:lnSpc>
               <a:spcAft>
-                <a:spcPts val="700"/>
-              </a:spcAft>
-              <a:defRPr sz="1180">
+                <a:spcPts val="800"/>
+              </a:spcAft>
+              <a:defRPr sz="1160">
                 <a:solidFill>
                   <a:srgbClr val="0F172A"/>
                 </a:solidFill>
@@ -15955,12 +15955,12 @@
           <a:p>
             <a:pPr>
               <a:lnSpc>
-                <a:spcPct val="126000"/>
+                <a:spcPct val="125000"/>
               </a:lnSpc>
               <a:spcAft>
-                <a:spcPts val="700"/>
-              </a:spcAft>
-              <a:defRPr sz="1180">
+                <a:spcPts val="800"/>
+              </a:spcAft>
+              <a:defRPr sz="1160">
                 <a:solidFill>
                   <a:srgbClr val="0F172A"/>
                 </a:solidFill>
@@ -15974,12 +15974,12 @@
           <a:p>
             <a:pPr>
               <a:lnSpc>
-                <a:spcPct val="126000"/>
+                <a:spcPct val="125000"/>
               </a:lnSpc>
               <a:spcAft>
-                <a:spcPts val="700"/>
-              </a:spcAft>
-              <a:defRPr sz="1180">
+                <a:spcPts val="800"/>
+              </a:spcAft>
+              <a:defRPr sz="1160">
                 <a:solidFill>
                   <a:srgbClr val="0F172A"/>
                 </a:solidFill>
@@ -16000,8 +16000,8 @@
         </p:nvSpPr>
         <p:spPr>
           <a:xfrm>
-            <a:off x="8083296" y="1115568"/>
-            <a:ext cx="3547872" cy="4114800"/>
+            <a:off x="8138160" y="1115568"/>
+            <a:ext cx="3504895" cy="4114800"/>
           </a:xfrm>
           <a:prstGeom prst="roundRect">
             <a:avLst>
@@ -16047,8 +16047,8 @@
         </p:nvSpPr>
         <p:spPr>
           <a:xfrm>
-            <a:off x="8247888" y="1243584"/>
-            <a:ext cx="3218688" cy="3886200"/>
+            <a:off x="8302752" y="1243584"/>
+            <a:ext cx="3175711" cy="3840480"/>
           </a:xfrm>
           <a:prstGeom prst="rect">
             <a:avLst/>
@@ -16079,12 +16079,12 @@
           <a:p>
             <a:pPr>
               <a:lnSpc>
-                <a:spcPct val="126000"/>
+                <a:spcPct val="125000"/>
               </a:lnSpc>
               <a:spcAft>
-                <a:spcPts val="700"/>
-              </a:spcAft>
-              <a:defRPr sz="1180">
+                <a:spcPts val="800"/>
+              </a:spcAft>
+              <a:defRPr sz="1160">
                 <a:solidFill>
                   <a:srgbClr val="0F172A"/>
                 </a:solidFill>
@@ -16098,12 +16098,12 @@
           <a:p>
             <a:pPr>
               <a:lnSpc>
-                <a:spcPct val="126000"/>
+                <a:spcPct val="125000"/>
               </a:lnSpc>
               <a:spcAft>
-                <a:spcPts val="700"/>
-              </a:spcAft>
-              <a:defRPr sz="1180">
+                <a:spcPts val="800"/>
+              </a:spcAft>
+              <a:defRPr sz="1160">
                 <a:solidFill>
                   <a:srgbClr val="0F172A"/>
                 </a:solidFill>
@@ -16117,12 +16117,12 @@
           <a:p>
             <a:pPr>
               <a:lnSpc>
-                <a:spcPct val="126000"/>
+                <a:spcPct val="125000"/>
               </a:lnSpc>
               <a:spcAft>
-                <a:spcPts val="700"/>
-              </a:spcAft>
-              <a:defRPr sz="1180">
+                <a:spcPts val="800"/>
+              </a:spcAft>
+              <a:defRPr sz="1160">
                 <a:solidFill>
                   <a:srgbClr val="0F172A"/>
                 </a:solidFill>
@@ -16136,12 +16136,12 @@
           <a:p>
             <a:pPr>
               <a:lnSpc>
-                <a:spcPct val="126000"/>
+                <a:spcPct val="125000"/>
               </a:lnSpc>
               <a:spcAft>
-                <a:spcPts val="700"/>
-              </a:spcAft>
-              <a:defRPr sz="1180">
+                <a:spcPts val="800"/>
+              </a:spcAft>
+              <a:defRPr sz="1160">
                 <a:solidFill>
                   <a:srgbClr val="0F172A"/>
                 </a:solidFill>
@@ -16587,7 +16587,7 @@
         <p:spPr>
           <a:xfrm>
             <a:off x="548640" y="1115568"/>
-            <a:ext cx="5577840" cy="4114800"/>
+            <a:ext cx="5486400" cy="4114800"/>
           </a:xfrm>
           <a:prstGeom prst="roundRect">
             <a:avLst>
@@ -16633,8 +16633,8 @@
         </p:nvSpPr>
         <p:spPr>
           <a:xfrm>
-            <a:off x="731520" y="1188720"/>
-            <a:ext cx="5212080" cy="320040"/>
+            <a:off x="731520" y="1207008"/>
+            <a:ext cx="5120640" cy="365760"/>
           </a:xfrm>
           <a:prstGeom prst="rect">
             <a:avLst/>
@@ -17584,7 +17584,7 @@
           <a:p>
             <a:pPr>
               <a:spcAft>
-                <a:spcPts val="800"/>
+                <a:spcPts val="600"/>
               </a:spcAft>
               <a:defRPr sz="1550" b="1">
                 <a:solidFill>
@@ -17600,12 +17600,12 @@
           <a:p>
             <a:pPr>
               <a:lnSpc>
-                <a:spcPct val="125000"/>
+                <a:spcPct val="120000"/>
               </a:lnSpc>
               <a:spcAft>
-                <a:spcPts val="500"/>
-              </a:spcAft>
-              <a:defRPr sz="1180">
+                <a:spcPts val="300"/>
+              </a:spcAft>
+              <a:defRPr sz="1080">
                 <a:solidFill>
                   <a:srgbClr val="0F172A"/>
                 </a:solidFill>
@@ -17613,18 +17613,18 @@
               </a:defRPr>
             </a:pPr>
             <a:r>
-              <a:t>• 结构参数常数 [物理常数]：Llama-3-70B，80 层，GQA 机制，TP=8 单卡 40 KB/Token；</a:t>
+              <a:t>• 结构参数常数 [物理常数]：70B 共 80 层，GQA，TP=8 单卡 40 KB/Token；</a:t>
             </a:r>
           </a:p>
           <a:p>
             <a:pPr>
               <a:lnSpc>
-                <a:spcPct val="125000"/>
+                <a:spcPct val="120000"/>
               </a:lnSpc>
               <a:spcAft>
-                <a:spcPts val="500"/>
-              </a:spcAft>
-              <a:defRPr sz="1180">
+                <a:spcPts val="300"/>
+              </a:spcAft>
+              <a:defRPr sz="1080">
                 <a:solidFill>
                   <a:srgbClr val="0F172A"/>
                 </a:solidFill>
@@ -17632,18 +17632,18 @@
               </a:defRPr>
             </a:pPr>
             <a:r>
-              <a:t>• 典型业务输入 [假设场景]：16K Prompt (命中 8K 前缀)，生成 128 Tokens；</a:t>
+              <a:t>• 典型业务输入 [假设场景]：16K 请求命中 8K 前缀，生成 128 Tokens；</a:t>
             </a:r>
           </a:p>
           <a:p>
             <a:pPr>
               <a:lnSpc>
-                <a:spcPct val="125000"/>
+                <a:spcPct val="120000"/>
               </a:lnSpc>
               <a:spcAft>
-                <a:spcPts val="500"/>
-              </a:spcAft>
-              <a:defRPr sz="1180">
+                <a:spcPts val="300"/>
+              </a:spcAft>
+              <a:defRPr sz="1080">
                 <a:solidFill>
                   <a:srgbClr val="0F172A"/>
                 </a:solidFill>
@@ -17651,18 +17651,18 @@
               </a:defRPr>
             </a:pPr>
             <a:r>
-              <a:t>• 单卡复用数据量 [推导计算]：V = 8192 Tokens × 40 KB = 320 MB (整机 2.56 GB)；</a:t>
+              <a:t>• 单卡复用数据量 [推导计算]：V = 8192 × 40KB = 320 MB (整机 2.56GB)；</a:t>
             </a:r>
           </a:p>
           <a:p>
             <a:pPr>
               <a:lnSpc>
-                <a:spcPct val="125000"/>
+                <a:spcPct val="120000"/>
               </a:lnSpc>
               <a:spcAft>
-                <a:spcPts val="500"/>
-              </a:spcAft>
-              <a:defRPr sz="1180">
+                <a:spcPts val="300"/>
+              </a:spcAft>
+              <a:defRPr sz="1080">
                 <a:solidFill>
                   <a:srgbClr val="0F172A"/>
                 </a:solidFill>
@@ -17670,18 +17670,18 @@
               </a:defRPr>
             </a:pPr>
             <a:r>
-              <a:t>• 硬件链路能力 [标称假设]：单卡有效 URMA 带宽 20 GB/s，HBM 物理带宽 1.2 TB/s；</a:t>
+              <a:t>• 硬件链路能力 [标称假设]：单卡有效带宽 20GB/s，HBM 物理带宽 1.2TB/s；</a:t>
             </a:r>
           </a:p>
           <a:p>
             <a:pPr>
               <a:lnSpc>
-                <a:spcPct val="125000"/>
+                <a:spcPct val="120000"/>
               </a:lnSpc>
               <a:spcAft>
-                <a:spcPts val="500"/>
-              </a:spcAft>
-              <a:defRPr sz="1180">
+                <a:spcPts val="300"/>
+              </a:spcAft>
+              <a:defRPr sz="1080">
                 <a:solidFill>
                   <a:srgbClr val="0F172A"/>
                 </a:solidFill>
@@ -17689,18 +17689,18 @@
               </a:defRPr>
             </a:pPr>
             <a:r>
-              <a:t>• 算力基准常数 [基准假设]：16K 重算 420.0ms；8K 后缀因果计算 220.0ms；</a:t>
+              <a:t>• 算力基准常数 [基准假设]：16K 重算 420ms，8K 后缀因果计算 220ms；</a:t>
             </a:r>
           </a:p>
           <a:p>
             <a:pPr>
               <a:lnSpc>
-                <a:spcPct val="125000"/>
+                <a:spcPct val="120000"/>
               </a:lnSpc>
               <a:spcAft>
-                <a:spcPts val="500"/>
-              </a:spcAft>
-              <a:defRPr sz="1180">
+                <a:spcPts val="300"/>
+              </a:spcAft>
+              <a:defRPr sz="1080">
                 <a:solidFill>
                   <a:srgbClr val="0F172A"/>
                 </a:solidFill>
@@ -17708,18 +17708,18 @@
               </a:defRPr>
             </a:pPr>
             <a:r>
-              <a:t>• 纯算力节省空间 [推导值]：ΔT_comp = 420.0 ms − 220.0 ms = 200.0 ms；</a:t>
+              <a:t>• 纯算力节省空间 [推导值]：ΔT_comp = 420ms − 220ms = 200ms；</a:t>
             </a:r>
           </a:p>
           <a:p>
             <a:pPr>
               <a:lnSpc>
-                <a:spcPct val="125000"/>
+                <a:spcPct val="120000"/>
               </a:lnSpc>
               <a:spcAft>
-                <a:spcPts val="500"/>
-              </a:spcAft>
-              <a:defRPr sz="1180">
+                <a:spcPts val="300"/>
+              </a:spcAft>
+              <a:defRPr sz="1080">
                 <a:solidFill>
                   <a:srgbClr val="0F172A"/>
                 </a:solidFill>
@@ -17727,7 +17727,7 @@
               </a:defRPr>
             </a:pPr>
             <a:r>
-              <a:t>• 物理瓶颈 [推导值]：串行拉取 320MB 耗时 16~24ms，未掩盖将吞噬收益；</a:t>
+              <a:t>• 物理搬运瓶颈 [推导值]：串行拉取 320MB 耗时 24ms (吞噬净收益)。</a:t>
             </a:r>
           </a:p>
         </p:txBody>
@@ -17802,7 +17802,7 @@
           <a:lstStyle/>
           <a:p>
             <a:pPr>
-              <a:defRPr sz="1180" b="1">
+              <a:defRPr sz="1120" b="1">
                 <a:solidFill>
                   <a:srgbClr val="1D4ED8"/>
                 </a:solidFill>
@@ -17810,7 +17810,7 @@
               </a:defRPr>
             </a:pPr>
             <a:r>
-              <a:t>关键路径推导：TTFT = T_control (0.50ms [目标]) + T_load (0.31ms [推导]) + T_sync (0.08ms [目标]) + T_suffix (220.0ms [假设]) = 220.89 ms [模型推导值]</a:t>
+              <a:t>关键路径推导 [模型]：TTFT = T_ctrl(0.50ms[目标]) + T_load(0.31ms[推导]) + T_sync(0.08ms[目标]) + T_suffix(220ms[假设]) = 220.89ms [推导值]</a:t>
             </a:r>
           </a:p>
         </p:txBody>
@@ -18446,9 +18446,6 @@
               <a:lnSpc>
                 <a:spcPct val="122000"/>
               </a:lnSpc>
-              <a:spcAft>
-                <a:spcPts val="400"/>
-              </a:spcAft>
               <a:defRPr sz="1160" b="0">
                 <a:solidFill>
                   <a:srgbClr val="0F172A"/>
@@ -18465,9 +18462,6 @@
               <a:lnSpc>
                 <a:spcPct val="122000"/>
               </a:lnSpc>
-              <a:spcAft>
-                <a:spcPts val="400"/>
-              </a:spcAft>
               <a:defRPr sz="1160" b="1">
                 <a:solidFill>
                   <a:srgbClr val="0F172A"/>
@@ -18484,9 +18478,6 @@
               <a:lnSpc>
                 <a:spcPct val="122000"/>
               </a:lnSpc>
-              <a:spcAft>
-                <a:spcPts val="400"/>
-              </a:spcAft>
               <a:defRPr sz="1160" b="0">
                 <a:solidFill>
                   <a:srgbClr val="0F172A"/>
@@ -18503,9 +18494,6 @@
               <a:lnSpc>
                 <a:spcPct val="122000"/>
               </a:lnSpc>
-              <a:spcAft>
-                <a:spcPts val="400"/>
-              </a:spcAft>
               <a:defRPr sz="1160" b="0">
                 <a:solidFill>
                   <a:srgbClr val="0F172A"/>
@@ -18514,7 +18502,7 @@
               </a:defRPr>
             </a:pPr>
             <a:r>
-              <a:t>  • 盈亏门槛 [推导值]：命中前缀必须超过 850 Tokens，才能弥补控制开销；</a:t>
+              <a:t>  • 盈亏门槛 [推导值]：命中前缀须超 850 Tokens 才能弥补开销；</a:t>
             </a:r>
           </a:p>
           <a:p>
@@ -18522,9 +18510,6 @@
               <a:lnSpc>
                 <a:spcPct val="122000"/>
               </a:lnSpc>
-              <a:spcAft>
-                <a:spcPts val="400"/>
-              </a:spcAft>
               <a:defRPr sz="1160" b="0">
                 <a:solidFill>
                   <a:srgbClr val="0F172A"/>
@@ -18541,9 +18526,6 @@
               <a:lnSpc>
                 <a:spcPct val="122000"/>
               </a:lnSpc>
-              <a:spcAft>
-                <a:spcPts val="400"/>
-              </a:spcAft>
               <a:defRPr sz="1160" b="1">
                 <a:solidFill>
                   <a:srgbClr val="0F172A"/>
@@ -18560,9 +18542,6 @@
               <a:lnSpc>
                 <a:spcPct val="122000"/>
               </a:lnSpc>
-              <a:spcAft>
-                <a:spcPts val="400"/>
-              </a:spcAft>
               <a:defRPr sz="1160" b="0">
                 <a:solidFill>
                   <a:srgbClr val="0F172A"/>
@@ -18579,9 +18558,6 @@
               <a:lnSpc>
                 <a:spcPct val="122000"/>
               </a:lnSpc>
-              <a:spcAft>
-                <a:spcPts val="400"/>
-              </a:spcAft>
               <a:defRPr sz="1160" b="0">
                 <a:solidFill>
                   <a:srgbClr val="1E3A8A"/>
@@ -18598,9 +18574,6 @@
               <a:lnSpc>
                 <a:spcPct val="122000"/>
               </a:lnSpc>
-              <a:spcAft>
-                <a:spcPts val="400"/>
-              </a:spcAft>
               <a:defRPr sz="1160" b="1">
                 <a:solidFill>
                   <a:srgbClr val="1E3A8A"/>
@@ -19107,12 +19080,12 @@
           <a:p>
             <a:pPr>
               <a:lnSpc>
-                <a:spcPct val="124000"/>
+                <a:spcPct val="118000"/>
               </a:lnSpc>
               <a:spcAft>
-                <a:spcPts val="400"/>
-              </a:spcAft>
-              <a:defRPr sz="1180" b="0">
+                <a:spcPts val="200"/>
+              </a:spcAft>
+              <a:defRPr sz="1060" b="0">
                 <a:solidFill>
                   <a:srgbClr val="0F172A"/>
                 </a:solidFill>
@@ -19120,18 +19093,18 @@
               </a:defRPr>
             </a:pPr>
             <a:r>
-              <a:t>模型物理拆解 [物理常数]：70B 模型共 80 层，单卡 320MB 缓存对应每层 4.0MB；</a:t>
+              <a:t>模型物理拆解 [物理常数]：70B 模型共 80 层，单卡 320MB 对应每层 4MB；</a:t>
             </a:r>
           </a:p>
           <a:p>
             <a:pPr>
               <a:lnSpc>
-                <a:spcPct val="124000"/>
+                <a:spcPct val="118000"/>
               </a:lnSpc>
               <a:spcAft>
-                <a:spcPts val="400"/>
-              </a:spcAft>
-              <a:defRPr sz="1180" b="0">
+                <a:spcPts val="200"/>
+              </a:spcAft>
+              <a:defRPr sz="1060" b="0">
                 <a:solidFill>
                   <a:srgbClr val="0F172A"/>
                 </a:solidFill>
@@ -19145,12 +19118,12 @@
           <a:p>
             <a:pPr>
               <a:lnSpc>
-                <a:spcPct val="124000"/>
+                <a:spcPct val="118000"/>
               </a:lnSpc>
               <a:spcAft>
-                <a:spcPts val="400"/>
-              </a:spcAft>
-              <a:defRPr sz="1180" b="0">
+                <a:spcPts val="200"/>
+              </a:spcAft>
+              <a:defRPr sz="1060" b="0">
                 <a:solidFill>
                   <a:srgbClr val="0F172A"/>
                 </a:solidFill>
@@ -19158,18 +19131,18 @@
               </a:defRPr>
             </a:pPr>
             <a:r>
-              <a:t>  • 单层增量 Prefill 计算耗时 [基准推导]：c = 220.0 ms / 80 = 2.75 ms；</a:t>
+              <a:t>  • 单层增量计算耗时 [基准推导]：c = 220.0ms / 80 = 2.75ms；</a:t>
             </a:r>
           </a:p>
           <a:p>
             <a:pPr>
               <a:lnSpc>
-                <a:spcPct val="124000"/>
+                <a:spcPct val="118000"/>
               </a:lnSpc>
               <a:spcAft>
-                <a:spcPts val="400"/>
-              </a:spcAft>
-              <a:defRPr sz="1180" b="0">
+                <a:spcPts val="200"/>
+              </a:spcAft>
+              <a:defRPr sz="1060" b="0">
                 <a:solidFill>
                   <a:srgbClr val="0F172A"/>
                 </a:solidFill>
@@ -19177,18 +19150,18 @@
               </a:defRPr>
             </a:pPr>
             <a:r>
-              <a:t>  • 单层 4.0MB 传输耗时 [模型推导]：x = 4MB / 20GB/s = 0.20ms (调度开销下 ≤ 0.31ms)；</a:t>
+              <a:t>  • 单层 4MB 传输 [推导]：x = 4MB / 20GB/s = 0.20ms (调度 ≤ 0.31ms)；</a:t>
             </a:r>
           </a:p>
           <a:p>
             <a:pPr>
               <a:lnSpc>
-                <a:spcPct val="124000"/>
+                <a:spcPct val="118000"/>
               </a:lnSpc>
               <a:spcAft>
-                <a:spcPts val="400"/>
-              </a:spcAft>
-              <a:defRPr sz="1180" b="1">
+                <a:spcPts val="200"/>
+              </a:spcAft>
+              <a:defRPr sz="1060" b="1">
                 <a:solidFill>
                   <a:srgbClr val="0F172A"/>
                 </a:solidFill>
@@ -19196,18 +19169,18 @@
               </a:defRPr>
             </a:pPr>
             <a:r>
-              <a:t>体系结构特性 [物理分析]：单层计算耗时 (2.75ms) 是传输耗时 (0.31ms) 近 9 倍；</a:t>
+              <a:t>体系结构特性 [物理分析]：单层计算 (2.75ms) 是传输 (0.31ms) 近 9 倍；</a:t>
             </a:r>
           </a:p>
           <a:p>
             <a:pPr>
               <a:lnSpc>
-                <a:spcPct val="124000"/>
+                <a:spcPct val="118000"/>
               </a:lnSpc>
               <a:spcAft>
-                <a:spcPts val="400"/>
-              </a:spcAft>
-              <a:defRPr sz="1180" b="0">
+                <a:spcPts val="200"/>
+              </a:spcAft>
+              <a:defRPr sz="1060" b="0">
                 <a:solidFill>
                   <a:srgbClr val="0F172A"/>
                 </a:solidFill>
@@ -19221,12 +19194,12 @@
           <a:p>
             <a:pPr>
               <a:lnSpc>
-                <a:spcPct val="124000"/>
+                <a:spcPct val="118000"/>
               </a:lnSpc>
               <a:spcAft>
-                <a:spcPts val="400"/>
-              </a:spcAft>
-              <a:defRPr sz="1180" b="0">
+                <a:spcPts val="200"/>
+              </a:spcAft>
+              <a:defRPr sz="1060" b="0">
                 <a:solidFill>
                   <a:srgbClr val="0F172A"/>
                 </a:solidFill>
@@ -19234,18 +19207,18 @@
               </a:defRPr>
             </a:pPr>
             <a:r>
-              <a:t>  • 串行拉取暴露时间 [推导值]：80 × 0.31 ms = 24.80 ms；</a:t>
+              <a:t>  • 串行拉取暴露耗时 [推导值]：80 × 0.31 ms = 24.80 ms；</a:t>
             </a:r>
           </a:p>
           <a:p>
             <a:pPr>
               <a:lnSpc>
-                <a:spcPct val="124000"/>
+                <a:spcPct val="118000"/>
               </a:lnSpc>
               <a:spcAft>
-                <a:spcPts val="400"/>
-              </a:spcAft>
-              <a:defRPr sz="1180" b="0">
+                <a:spcPts val="200"/>
+              </a:spcAft>
+              <a:defRPr sz="1060" b="0">
                 <a:solidFill>
                   <a:srgbClr val="0F172A"/>
                 </a:solidFill>
@@ -19253,18 +19226,18 @@
               </a:defRPr>
             </a:pPr>
             <a:r>
-              <a:t>  • 逐层流水暴露时间 [推导值]：仅暴露 Layer 0 启动传输耗时 x_0 = 0.31 ms；</a:t>
+              <a:t>  • 逐层流水暴露耗时 [推导值]：仅暴露首层启动传输耗时 x_0 = 0.31ms；</a:t>
             </a:r>
           </a:p>
           <a:p>
             <a:pPr>
               <a:lnSpc>
-                <a:spcPct val="124000"/>
+                <a:spcPct val="118000"/>
               </a:lnSpc>
               <a:spcAft>
-                <a:spcPts val="400"/>
-              </a:spcAft>
-              <a:defRPr sz="1180" b="1">
+                <a:spcPts val="200"/>
+              </a:spcAft>
+              <a:defRPr sz="1060" b="1">
                 <a:solidFill>
                   <a:srgbClr val="1E3A8A"/>
                 </a:solidFill>
@@ -19272,7 +19245,7 @@
               </a:defRPr>
             </a:pPr>
             <a:r>
-              <a:t>物理消除幅度 [推导值]：流水线掩盖 98.7% 传输耗时，单卡净节省 24.49 ms。</a:t>
+              <a:t>物理消除幅度 [推导值]：流水线掩盖 98.7% 传输耗时，单卡净省 24.49 ms。</a:t>
             </a:r>
           </a:p>
         </p:txBody>
@@ -19873,10 +19846,10 @@
                 <a:tableStyleId>{5C22544A-7EE6-4342-B048-85BDC9FD1C3A}</a:tableStyleId>
               </a:tblPr>
               <a:tblGrid>
+                <a:gridCol w="1417320"/>
                 <a:gridCol w="1645920"/>
-                <a:gridCol w="1371600"/>
                 <a:gridCol w="2148840"/>
-                <a:gridCol w="2240280"/>
+                <a:gridCol w="2194560"/>
                 <a:gridCol w="3687775"/>
               </a:tblGrid>
               <a:tr h="377952">
@@ -19918,7 +19891,7 @@
                         </a:defRPr>
                       </a:pPr>
                       <a:r>
-                        <a:t>① 本地完全重算 [基准假设]</a:t>
+                        <a:t>① 本地重算 [基准假设]</a:t>
                       </a:r>
                     </a:p>
                   </a:txBody>
@@ -20008,7 +19981,7 @@
                     <a:lstStyle/>
                     <a:p>
                       <a:pPr algn="ctr">
-                        <a:defRPr sz="1050" b="1">
+                        <a:defRPr sz="1000" b="1">
                           <a:solidFill>
                             <a:srgbClr val="0F172A"/>
                           </a:solidFill>
@@ -20032,7 +20005,7 @@
                     <a:lstStyle/>
                     <a:p>
                       <a:pPr algn="l">
-                        <a:defRPr sz="1050">
+                        <a:defRPr sz="1000">
                           <a:solidFill>
                             <a:srgbClr val="0F172A"/>
                           </a:solidFill>
@@ -20056,7 +20029,7 @@
                     <a:lstStyle/>
                     <a:p>
                       <a:pPr algn="l">
-                        <a:defRPr sz="1050">
+                        <a:defRPr sz="1000">
                           <a:solidFill>
                             <a:srgbClr val="0F172A"/>
                           </a:solidFill>
@@ -20064,7 +20037,7 @@
                         </a:defRPr>
                       </a:pPr>
                       <a:r>
-                        <a:t>21.00 ms [估算] (TCP 12.5+CPU 8.5)</a:t>
+                        <a:t>21.00 ms [估算] (TCP 12.5+CPU 8.5ms)</a:t>
                       </a:r>
                     </a:p>
                   </a:txBody>
@@ -20080,7 +20053,7 @@
                     <a:lstStyle/>
                     <a:p>
                       <a:pPr algn="l">
-                        <a:defRPr sz="1050">
+                        <a:defRPr sz="1000">
                           <a:solidFill>
                             <a:srgbClr val="0F172A"/>
                           </a:solidFill>
@@ -20088,7 +20061,7 @@
                         </a:defRPr>
                       </a:pPr>
                       <a:r>
-                        <a:t>0.50 ms [推导] (含URMA 18µs实测)</a:t>
+                        <a:t>0.50 ms [推导] (含 18µs 实测)</a:t>
                       </a:r>
                     </a:p>
                   </a:txBody>
@@ -20104,7 +20077,7 @@
                     <a:lstStyle/>
                     <a:p>
                       <a:pPr algn="l">
-                        <a:defRPr sz="1050">
+                        <a:defRPr sz="1000">
                           <a:solidFill>
                             <a:srgbClr val="0F172A"/>
                           </a:solidFill>
@@ -20130,7 +20103,7 @@
                     <a:lstStyle/>
                     <a:p>
                       <a:pPr algn="ctr">
-                        <a:defRPr sz="1050" b="1">
+                        <a:defRPr sz="1000" b="1">
                           <a:solidFill>
                             <a:srgbClr val="0F172A"/>
                           </a:solidFill>
@@ -20154,7 +20127,7 @@
                     <a:lstStyle/>
                     <a:p>
                       <a:pPr algn="l">
-                        <a:defRPr sz="1050">
+                        <a:defRPr sz="1000">
                           <a:solidFill>
                             <a:srgbClr val="0F172A"/>
                           </a:solidFill>
@@ -20178,7 +20151,7 @@
                     <a:lstStyle/>
                     <a:p>
                       <a:pPr algn="l">
-                        <a:defRPr sz="1050">
+                        <a:defRPr sz="1000">
                           <a:solidFill>
                             <a:srgbClr val="0F172A"/>
                           </a:solidFill>
@@ -20202,7 +20175,7 @@
                     <a:lstStyle/>
                     <a:p>
                       <a:pPr algn="l">
-                        <a:defRPr sz="1050">
+                        <a:defRPr sz="1000">
                           <a:solidFill>
                             <a:srgbClr val="0F172A"/>
                           </a:solidFill>
@@ -20226,7 +20199,7 @@
                     <a:lstStyle/>
                     <a:p>
                       <a:pPr algn="l">
-                        <a:defRPr sz="1050">
+                        <a:defRPr sz="1000">
                           <a:solidFill>
                             <a:srgbClr val="0F172A"/>
                           </a:solidFill>
@@ -20252,7 +20225,7 @@
                     <a:lstStyle/>
                     <a:p>
                       <a:pPr algn="ctr">
-                        <a:defRPr sz="1050" b="1">
+                        <a:defRPr sz="1000" b="1">
                           <a:solidFill>
                             <a:srgbClr val="0F172A"/>
                           </a:solidFill>
@@ -20276,7 +20249,7 @@
                     <a:lstStyle/>
                     <a:p>
                       <a:pPr algn="l">
-                        <a:defRPr sz="1050">
+                        <a:defRPr sz="1000">
                           <a:solidFill>
                             <a:srgbClr val="0F172A"/>
                           </a:solidFill>
@@ -20300,7 +20273,7 @@
                     <a:lstStyle/>
                     <a:p>
                       <a:pPr algn="l">
-                        <a:defRPr sz="1050">
+                        <a:defRPr sz="1000">
                           <a:solidFill>
                             <a:srgbClr val="0F172A"/>
                           </a:solidFill>
@@ -20324,7 +20297,7 @@
                     <a:lstStyle/>
                     <a:p>
                       <a:pPr algn="l">
-                        <a:defRPr sz="1050">
+                        <a:defRPr sz="1000">
                           <a:solidFill>
                             <a:srgbClr val="0F172A"/>
                           </a:solidFill>
@@ -20348,7 +20321,7 @@
                     <a:lstStyle/>
                     <a:p>
                       <a:pPr algn="l">
-                        <a:defRPr sz="1050">
+                        <a:defRPr sz="1000">
                           <a:solidFill>
                             <a:srgbClr val="0F172A"/>
                           </a:solidFill>
@@ -20374,7 +20347,7 @@
                     <a:lstStyle/>
                     <a:p>
                       <a:pPr algn="ctr">
-                        <a:defRPr sz="1050" b="1">
+                        <a:defRPr sz="1000" b="1">
                           <a:solidFill>
                             <a:srgbClr val="0F172A"/>
                           </a:solidFill>
@@ -20398,7 +20371,7 @@
                     <a:lstStyle/>
                     <a:p>
                       <a:pPr algn="l">
-                        <a:defRPr sz="1050">
+                        <a:defRPr sz="1000">
                           <a:solidFill>
                             <a:srgbClr val="0F172A"/>
                           </a:solidFill>
@@ -20422,7 +20395,7 @@
                     <a:lstStyle/>
                     <a:p>
                       <a:pPr algn="l">
-                        <a:defRPr sz="1050">
+                        <a:defRPr sz="1000">
                           <a:solidFill>
                             <a:srgbClr val="0F172A"/>
                           </a:solidFill>
@@ -20446,7 +20419,7 @@
                     <a:lstStyle/>
                     <a:p>
                       <a:pPr algn="l">
-                        <a:defRPr sz="1050">
+                        <a:defRPr sz="1000">
                           <a:solidFill>
                             <a:srgbClr val="0F172A"/>
                           </a:solidFill>
@@ -20470,7 +20443,7 @@
                     <a:lstStyle/>
                     <a:p>
                       <a:pPr algn="l">
-                        <a:defRPr sz="1050">
+                        <a:defRPr sz="1000">
                           <a:solidFill>
                             <a:srgbClr val="0F172A"/>
                           </a:solidFill>
@@ -20496,7 +20469,7 @@
                     <a:lstStyle/>
                     <a:p>
                       <a:pPr algn="ctr">
-                        <a:defRPr sz="1050" b="1">
+                        <a:defRPr sz="1000" b="1">
                           <a:solidFill>
                             <a:srgbClr val="0F172A"/>
                           </a:solidFill>
@@ -20520,7 +20493,7 @@
                     <a:lstStyle/>
                     <a:p>
                       <a:pPr algn="l">
-                        <a:defRPr sz="1050">
+                        <a:defRPr sz="1000">
                           <a:solidFill>
                             <a:srgbClr val="0F172A"/>
                           </a:solidFill>
@@ -20544,7 +20517,7 @@
                     <a:lstStyle/>
                     <a:p>
                       <a:pPr algn="l">
-                        <a:defRPr sz="1050">
+                        <a:defRPr sz="1000">
                           <a:solidFill>
                             <a:srgbClr val="0F172A"/>
                           </a:solidFill>
@@ -20568,7 +20541,7 @@
                     <a:lstStyle/>
                     <a:p>
                       <a:pPr algn="l">
-                        <a:defRPr sz="1050">
+                        <a:defRPr sz="1000">
                           <a:solidFill>
                             <a:srgbClr val="0F172A"/>
                           </a:solidFill>
@@ -20592,7 +20565,7 @@
                     <a:lstStyle/>
                     <a:p>
                       <a:pPr algn="l">
-                        <a:defRPr sz="1050">
+                        <a:defRPr sz="1000">
                           <a:solidFill>
                             <a:srgbClr val="0F172A"/>
                           </a:solidFill>
@@ -20618,7 +20591,7 @@
                     <a:lstStyle/>
                     <a:p>
                       <a:pPr algn="ctr">
-                        <a:defRPr sz="1050" b="1">
+                        <a:defRPr sz="1000" b="1">
                           <a:solidFill>
                             <a:srgbClr val="0F172A"/>
                           </a:solidFill>
@@ -20642,7 +20615,7 @@
                     <a:lstStyle/>
                     <a:p>
                       <a:pPr algn="l">
-                        <a:defRPr sz="1050">
+                        <a:defRPr sz="1000">
                           <a:solidFill>
                             <a:srgbClr val="0F172A"/>
                           </a:solidFill>
@@ -20666,7 +20639,7 @@
                     <a:lstStyle/>
                     <a:p>
                       <a:pPr algn="l">
-                        <a:defRPr sz="1050">
+                        <a:defRPr sz="1000">
                           <a:solidFill>
                             <a:srgbClr val="0F172A"/>
                           </a:solidFill>
@@ -20690,7 +20663,7 @@
                     <a:lstStyle/>
                     <a:p>
                       <a:pPr algn="l">
-                        <a:defRPr sz="1050">
+                        <a:defRPr sz="1000">
                           <a:solidFill>
                             <a:srgbClr val="0F172A"/>
                           </a:solidFill>
@@ -20714,7 +20687,7 @@
                     <a:lstStyle/>
                     <a:p>
                       <a:pPr algn="l">
-                        <a:defRPr sz="1050">
+                        <a:defRPr sz="1000">
                           <a:solidFill>
                             <a:srgbClr val="0F172A"/>
                           </a:solidFill>
@@ -20740,7 +20713,7 @@
                     <a:lstStyle/>
                     <a:p>
                       <a:pPr algn="ctr">
-                        <a:defRPr sz="1050" b="1">
+                        <a:defRPr sz="1000" b="1">
                           <a:solidFill>
                             <a:srgbClr val="0F172A"/>
                           </a:solidFill>
@@ -20764,7 +20737,7 @@
                     <a:lstStyle/>
                     <a:p>
                       <a:pPr algn="l">
-                        <a:defRPr sz="1050">
+                        <a:defRPr sz="1000">
                           <a:solidFill>
                             <a:srgbClr val="0F172A"/>
                           </a:solidFill>
@@ -20788,7 +20761,7 @@
                     <a:lstStyle/>
                     <a:p>
                       <a:pPr algn="l">
-                        <a:defRPr sz="1050">
+                        <a:defRPr sz="1000">
                           <a:solidFill>
                             <a:srgbClr val="0F172A"/>
                           </a:solidFill>
@@ -20812,7 +20785,7 @@
                     <a:lstStyle/>
                     <a:p>
                       <a:pPr algn="l">
-                        <a:defRPr sz="1050">
+                        <a:defRPr sz="1000">
                           <a:solidFill>
                             <a:srgbClr val="0F172A"/>
                           </a:solidFill>
@@ -20836,7 +20809,7 @@
                     <a:lstStyle/>
                     <a:p>
                       <a:pPr algn="l">
-                        <a:defRPr sz="1050">
+                        <a:defRPr sz="1000">
                           <a:solidFill>
                             <a:srgbClr val="0F172A"/>
                           </a:solidFill>
@@ -20862,7 +20835,7 @@
                     <a:lstStyle/>
                     <a:p>
                       <a:pPr algn="ctr">
-                        <a:defRPr sz="1050" b="1">
+                        <a:defRPr sz="1000" b="1">
                           <a:solidFill>
                             <a:srgbClr val="0F172A"/>
                           </a:solidFill>
@@ -20886,7 +20859,7 @@
                     <a:lstStyle/>
                     <a:p>
                       <a:pPr algn="l">
-                        <a:defRPr sz="1050">
+                        <a:defRPr sz="1000">
                           <a:solidFill>
                             <a:srgbClr val="0F172A"/>
                           </a:solidFill>
@@ -20910,7 +20883,7 @@
                     <a:lstStyle/>
                     <a:p>
                       <a:pPr algn="l">
-                        <a:defRPr sz="1050">
+                        <a:defRPr sz="1000">
                           <a:solidFill>
                             <a:srgbClr val="0F172A"/>
                           </a:solidFill>
@@ -20934,7 +20907,7 @@
                     <a:lstStyle/>
                     <a:p>
                       <a:pPr algn="l">
-                        <a:defRPr sz="1050">
+                        <a:defRPr sz="1000">
                           <a:solidFill>
                             <a:srgbClr val="0F172A"/>
                           </a:solidFill>
@@ -20958,7 +20931,7 @@
                     <a:lstStyle/>
                     <a:p>
                       <a:pPr algn="l">
-                        <a:defRPr sz="1050">
+                        <a:defRPr sz="1000">
                           <a:solidFill>
                             <a:srgbClr val="0F172A"/>
                           </a:solidFill>
@@ -20966,7 +20939,7 @@
                         </a:defRPr>
                       </a:pPr>
                       <a:r>
-                        <a:t>在 90% 超高复用场景下，自研净提速高达 52.6% [模型推导值]</a:t>
+                        <a:t>90% 超高复用场景下，自研净提速高达 52.6% [模型推导值]</a:t>
                       </a:r>
                     </a:p>
                   </a:txBody>
